--- a/docs/pptx/entire/ritu-entire-linsubhr-disc-throm3.pptx
+++ b/docs/pptx/entire/ritu-entire-linsubhr-disc-throm3.pptx
@@ -3046,560 +3046,560 @@
           <p:spPr>
             <a:xfrm>
               <a:off x="1172049" y="2073503"/>
-              <a:ext cx="7090630" cy="3161505"/>
+              <a:ext cx="7090630" cy="3162356"/>
             </a:xfrm>
             <a:custGeom>
               <a:avLst/>
               <a:pathLst>
-                <a:path w="7090630" h="3161505">
+                <a:path w="7090630" h="3162356">
                   <a:moveTo>
-                    <a:pt x="1237016" y="0"/>
+                    <a:pt x="1246909" y="0"/>
                   </a:moveTo>
                   <a:lnTo>
-                    <a:pt x="1289205" y="73443"/>
-                  </a:lnTo>
-                  <a:lnTo>
-                    <a:pt x="1360827" y="171341"/>
-                  </a:lnTo>
-                  <a:lnTo>
-                    <a:pt x="1432450" y="266428"/>
-                  </a:lnTo>
-                  <a:lnTo>
-                    <a:pt x="1504073" y="358786"/>
-                  </a:lnTo>
-                  <a:lnTo>
-                    <a:pt x="1575695" y="448493"/>
-                  </a:lnTo>
-                  <a:lnTo>
-                    <a:pt x="1647318" y="535624"/>
-                  </a:lnTo>
-                  <a:lnTo>
-                    <a:pt x="1718940" y="620255"/>
-                  </a:lnTo>
-                  <a:lnTo>
-                    <a:pt x="1790563" y="702456"/>
-                  </a:lnTo>
-                  <a:lnTo>
-                    <a:pt x="1862185" y="782297"/>
-                  </a:lnTo>
-                  <a:lnTo>
-                    <a:pt x="1933808" y="859846"/>
-                  </a:lnTo>
-                  <a:lnTo>
-                    <a:pt x="2005430" y="935169"/>
-                  </a:lnTo>
-                  <a:lnTo>
-                    <a:pt x="2077053" y="1008330"/>
-                  </a:lnTo>
-                  <a:lnTo>
-                    <a:pt x="2148675" y="1079390"/>
-                  </a:lnTo>
-                  <a:lnTo>
-                    <a:pt x="2220298" y="1148411"/>
-                  </a:lnTo>
-                  <a:lnTo>
-                    <a:pt x="2291920" y="1215451"/>
-                  </a:lnTo>
-                  <a:lnTo>
-                    <a:pt x="2363543" y="1280565"/>
-                  </a:lnTo>
-                  <a:lnTo>
-                    <a:pt x="2435165" y="1343811"/>
-                  </a:lnTo>
-                  <a:lnTo>
-                    <a:pt x="2506788" y="1405241"/>
-                  </a:lnTo>
-                  <a:lnTo>
-                    <a:pt x="2578410" y="1464908"/>
-                  </a:lnTo>
-                  <a:lnTo>
-                    <a:pt x="2650033" y="1522862"/>
-                  </a:lnTo>
-                  <a:lnTo>
-                    <a:pt x="2721655" y="1579152"/>
-                  </a:lnTo>
-                  <a:lnTo>
-                    <a:pt x="2793278" y="1633826"/>
-                  </a:lnTo>
-                  <a:lnTo>
-                    <a:pt x="2864901" y="1686931"/>
-                  </a:lnTo>
-                  <a:lnTo>
-                    <a:pt x="2936523" y="1738511"/>
-                  </a:lnTo>
-                  <a:lnTo>
-                    <a:pt x="3008146" y="1788611"/>
-                  </a:lnTo>
-                  <a:lnTo>
-                    <a:pt x="3079768" y="1837272"/>
-                  </a:lnTo>
-                  <a:lnTo>
-                    <a:pt x="3151391" y="1884537"/>
-                  </a:lnTo>
-                  <a:lnTo>
-                    <a:pt x="3223013" y="1930445"/>
-                  </a:lnTo>
-                  <a:lnTo>
-                    <a:pt x="3294636" y="1975034"/>
-                  </a:lnTo>
-                  <a:lnTo>
-                    <a:pt x="3366258" y="2018344"/>
-                  </a:lnTo>
-                  <a:lnTo>
-                    <a:pt x="3437881" y="2060411"/>
-                  </a:lnTo>
-                  <a:lnTo>
-                    <a:pt x="3509503" y="2101270"/>
-                  </a:lnTo>
-                  <a:lnTo>
-                    <a:pt x="3581126" y="2140956"/>
-                  </a:lnTo>
-                  <a:lnTo>
-                    <a:pt x="3652748" y="2179503"/>
-                  </a:lnTo>
-                  <a:lnTo>
-                    <a:pt x="3724371" y="2216943"/>
-                  </a:lnTo>
-                  <a:lnTo>
-                    <a:pt x="3795993" y="2253309"/>
-                  </a:lnTo>
-                  <a:lnTo>
-                    <a:pt x="3867616" y="2288630"/>
-                  </a:lnTo>
-                  <a:lnTo>
-                    <a:pt x="3939238" y="2322938"/>
-                  </a:lnTo>
-                  <a:lnTo>
-                    <a:pt x="4010861" y="2356261"/>
-                  </a:lnTo>
-                  <a:lnTo>
-                    <a:pt x="4082483" y="2388627"/>
-                  </a:lnTo>
-                  <a:lnTo>
-                    <a:pt x="4154106" y="2420064"/>
-                  </a:lnTo>
-                  <a:lnTo>
-                    <a:pt x="4225729" y="2450598"/>
-                  </a:lnTo>
-                  <a:lnTo>
-                    <a:pt x="4297351" y="2480257"/>
-                  </a:lnTo>
-                  <a:lnTo>
-                    <a:pt x="4368974" y="2509063"/>
-                  </a:lnTo>
-                  <a:lnTo>
-                    <a:pt x="4440596" y="2537043"/>
-                  </a:lnTo>
-                  <a:lnTo>
-                    <a:pt x="4512219" y="2564220"/>
-                  </a:lnTo>
-                  <a:lnTo>
-                    <a:pt x="4583841" y="2590616"/>
-                  </a:lnTo>
-                  <a:lnTo>
-                    <a:pt x="4655464" y="2616255"/>
-                  </a:lnTo>
-                  <a:lnTo>
-                    <a:pt x="4727086" y="2641157"/>
-                  </a:lnTo>
-                  <a:lnTo>
-                    <a:pt x="4798709" y="2657335"/>
-                  </a:lnTo>
-                  <a:lnTo>
-                    <a:pt x="4870331" y="2663917"/>
-                  </a:lnTo>
-                  <a:lnTo>
-                    <a:pt x="4941954" y="2670446"/>
-                  </a:lnTo>
-                  <a:lnTo>
-                    <a:pt x="5013576" y="2676924"/>
-                  </a:lnTo>
-                  <a:lnTo>
-                    <a:pt x="5085199" y="2683350"/>
-                  </a:lnTo>
-                  <a:lnTo>
-                    <a:pt x="5156821" y="2689725"/>
-                  </a:lnTo>
-                  <a:lnTo>
-                    <a:pt x="5228444" y="2696049"/>
-                  </a:lnTo>
-                  <a:lnTo>
-                    <a:pt x="5300066" y="2702322"/>
-                  </a:lnTo>
-                  <a:lnTo>
-                    <a:pt x="5371689" y="2708546"/>
-                  </a:lnTo>
-                  <a:lnTo>
-                    <a:pt x="5443311" y="2714720"/>
-                  </a:lnTo>
-                  <a:lnTo>
-                    <a:pt x="5514934" y="2720845"/>
-                  </a:lnTo>
-                  <a:lnTo>
-                    <a:pt x="5586557" y="2726921"/>
-                  </a:lnTo>
-                  <a:lnTo>
-                    <a:pt x="5658179" y="2732949"/>
-                  </a:lnTo>
-                  <a:lnTo>
-                    <a:pt x="5729802" y="2738929"/>
-                  </a:lnTo>
-                  <a:lnTo>
-                    <a:pt x="5801424" y="2744861"/>
-                  </a:lnTo>
-                  <a:lnTo>
-                    <a:pt x="5873047" y="2750746"/>
-                  </a:lnTo>
-                  <a:lnTo>
-                    <a:pt x="5944669" y="2756584"/>
-                  </a:lnTo>
-                  <a:lnTo>
-                    <a:pt x="6016292" y="2762375"/>
-                  </a:lnTo>
-                  <a:lnTo>
-                    <a:pt x="6087914" y="2768121"/>
-                  </a:lnTo>
-                  <a:lnTo>
-                    <a:pt x="6159537" y="2773820"/>
-                  </a:lnTo>
-                  <a:lnTo>
-                    <a:pt x="6231159" y="2779475"/>
-                  </a:lnTo>
-                  <a:lnTo>
-                    <a:pt x="6302782" y="2785084"/>
-                  </a:lnTo>
-                  <a:lnTo>
-                    <a:pt x="6374404" y="2790648"/>
-                  </a:lnTo>
-                  <a:lnTo>
-                    <a:pt x="6446027" y="2796169"/>
-                  </a:lnTo>
-                  <a:lnTo>
-                    <a:pt x="6517649" y="2801645"/>
-                  </a:lnTo>
-                  <a:lnTo>
-                    <a:pt x="6589272" y="2807078"/>
-                  </a:lnTo>
-                  <a:lnTo>
-                    <a:pt x="6660894" y="2812467"/>
-                  </a:lnTo>
-                  <a:lnTo>
-                    <a:pt x="6732517" y="2817813"/>
-                  </a:lnTo>
-                  <a:lnTo>
-                    <a:pt x="6804139" y="2823117"/>
-                  </a:lnTo>
-                  <a:lnTo>
-                    <a:pt x="6875762" y="2828379"/>
-                  </a:lnTo>
-                  <a:lnTo>
-                    <a:pt x="6947385" y="2833598"/>
-                  </a:lnTo>
-                  <a:lnTo>
-                    <a:pt x="7019007" y="2838777"/>
-                  </a:lnTo>
-                  <a:lnTo>
-                    <a:pt x="7090630" y="2843914"/>
-                  </a:lnTo>
-                  <a:lnTo>
-                    <a:pt x="7090630" y="3161505"/>
-                  </a:lnTo>
-                  <a:lnTo>
-                    <a:pt x="7019007" y="3151981"/>
-                  </a:lnTo>
-                  <a:lnTo>
-                    <a:pt x="6947385" y="3142176"/>
-                  </a:lnTo>
-                  <a:lnTo>
-                    <a:pt x="6875762" y="3132081"/>
-                  </a:lnTo>
-                  <a:lnTo>
-                    <a:pt x="6804139" y="3121687"/>
-                  </a:lnTo>
-                  <a:lnTo>
-                    <a:pt x="6732517" y="3110987"/>
-                  </a:lnTo>
-                  <a:lnTo>
-                    <a:pt x="6660894" y="3099970"/>
-                  </a:lnTo>
-                  <a:lnTo>
-                    <a:pt x="6589272" y="3088627"/>
-                  </a:lnTo>
-                  <a:lnTo>
-                    <a:pt x="6517649" y="3076949"/>
-                  </a:lnTo>
-                  <a:lnTo>
-                    <a:pt x="6446027" y="3064927"/>
-                  </a:lnTo>
-                  <a:lnTo>
-                    <a:pt x="6374404" y="3052548"/>
-                  </a:lnTo>
-                  <a:lnTo>
-                    <a:pt x="6302782" y="3039804"/>
-                  </a:lnTo>
-                  <a:lnTo>
-                    <a:pt x="6231159" y="3026684"/>
-                  </a:lnTo>
-                  <a:lnTo>
-                    <a:pt x="6159537" y="3013175"/>
-                  </a:lnTo>
-                  <a:lnTo>
-                    <a:pt x="6087914" y="2999268"/>
-                  </a:lnTo>
-                  <a:lnTo>
-                    <a:pt x="6016292" y="2984949"/>
-                  </a:lnTo>
-                  <a:lnTo>
-                    <a:pt x="5944669" y="2970207"/>
-                  </a:lnTo>
-                  <a:lnTo>
-                    <a:pt x="5873047" y="2955029"/>
-                  </a:lnTo>
-                  <a:lnTo>
-                    <a:pt x="5801424" y="2939403"/>
-                  </a:lnTo>
-                  <a:lnTo>
-                    <a:pt x="5729802" y="2923315"/>
-                  </a:lnTo>
-                  <a:lnTo>
-                    <a:pt x="5658179" y="2906751"/>
-                  </a:lnTo>
-                  <a:lnTo>
-                    <a:pt x="5586557" y="2889698"/>
-                  </a:lnTo>
-                  <a:lnTo>
-                    <a:pt x="5514934" y="2872141"/>
-                  </a:lnTo>
-                  <a:lnTo>
-                    <a:pt x="5443311" y="2854065"/>
-                  </a:lnTo>
-                  <a:lnTo>
-                    <a:pt x="5371689" y="2835455"/>
-                  </a:lnTo>
-                  <a:lnTo>
-                    <a:pt x="5300066" y="2816295"/>
-                  </a:lnTo>
-                  <a:lnTo>
-                    <a:pt x="5228444" y="2796569"/>
-                  </a:lnTo>
-                  <a:lnTo>
-                    <a:pt x="5156821" y="2776259"/>
-                  </a:lnTo>
-                  <a:lnTo>
-                    <a:pt x="5085199" y="2755349"/>
-                  </a:lnTo>
-                  <a:lnTo>
-                    <a:pt x="5013576" y="2733822"/>
-                  </a:lnTo>
-                  <a:lnTo>
-                    <a:pt x="4941954" y="2711658"/>
-                  </a:lnTo>
-                  <a:lnTo>
-                    <a:pt x="4870331" y="2688839"/>
-                  </a:lnTo>
-                  <a:lnTo>
-                    <a:pt x="4798709" y="2665345"/>
-                  </a:lnTo>
-                  <a:lnTo>
-                    <a:pt x="4727086" y="2650700"/>
-                  </a:lnTo>
-                  <a:lnTo>
-                    <a:pt x="4655464" y="2644012"/>
-                  </a:lnTo>
-                  <a:lnTo>
-                    <a:pt x="4583841" y="2637270"/>
-                  </a:lnTo>
-                  <a:lnTo>
-                    <a:pt x="4512219" y="2630474"/>
-                  </a:lnTo>
-                  <a:lnTo>
-                    <a:pt x="4440596" y="2623624"/>
-                  </a:lnTo>
-                  <a:lnTo>
-                    <a:pt x="4368974" y="2616718"/>
-                  </a:lnTo>
-                  <a:lnTo>
-                    <a:pt x="4297351" y="2609757"/>
-                  </a:lnTo>
-                  <a:lnTo>
-                    <a:pt x="4225729" y="2602740"/>
-                  </a:lnTo>
-                  <a:lnTo>
-                    <a:pt x="4154106" y="2595667"/>
-                  </a:lnTo>
-                  <a:lnTo>
-                    <a:pt x="4082483" y="2588537"/>
-                  </a:lnTo>
-                  <a:lnTo>
-                    <a:pt x="4010861" y="2581350"/>
-                  </a:lnTo>
-                  <a:lnTo>
-                    <a:pt x="3939238" y="2574105"/>
-                  </a:lnTo>
-                  <a:lnTo>
-                    <a:pt x="3867616" y="2566802"/>
-                  </a:lnTo>
-                  <a:lnTo>
-                    <a:pt x="3795993" y="2559440"/>
-                  </a:lnTo>
-                  <a:lnTo>
-                    <a:pt x="3724371" y="2552020"/>
-                  </a:lnTo>
-                  <a:lnTo>
-                    <a:pt x="3652748" y="2544539"/>
-                  </a:lnTo>
-                  <a:lnTo>
-                    <a:pt x="3581126" y="2536999"/>
-                  </a:lnTo>
-                  <a:lnTo>
-                    <a:pt x="3509503" y="2529398"/>
-                  </a:lnTo>
-                  <a:lnTo>
-                    <a:pt x="3437881" y="2521736"/>
-                  </a:lnTo>
-                  <a:lnTo>
-                    <a:pt x="3366258" y="2514012"/>
-                  </a:lnTo>
-                  <a:lnTo>
-                    <a:pt x="3294636" y="2506227"/>
-                  </a:lnTo>
-                  <a:lnTo>
-                    <a:pt x="3223013" y="2498379"/>
-                  </a:lnTo>
-                  <a:lnTo>
-                    <a:pt x="3151391" y="2490468"/>
-                  </a:lnTo>
-                  <a:lnTo>
-                    <a:pt x="3079768" y="2482493"/>
-                  </a:lnTo>
-                  <a:lnTo>
-                    <a:pt x="3008146" y="2474455"/>
-                  </a:lnTo>
-                  <a:lnTo>
-                    <a:pt x="2936523" y="2466352"/>
-                  </a:lnTo>
-                  <a:lnTo>
-                    <a:pt x="2864901" y="2458183"/>
-                  </a:lnTo>
-                  <a:lnTo>
-                    <a:pt x="2793278" y="2449950"/>
-                  </a:lnTo>
-                  <a:lnTo>
-                    <a:pt x="2721655" y="2441650"/>
-                  </a:lnTo>
-                  <a:lnTo>
-                    <a:pt x="2650033" y="2433283"/>
-                  </a:lnTo>
-                  <a:lnTo>
-                    <a:pt x="2578410" y="2424850"/>
-                  </a:lnTo>
-                  <a:lnTo>
-                    <a:pt x="2506788" y="2416348"/>
-                  </a:lnTo>
-                  <a:lnTo>
-                    <a:pt x="2435165" y="2407779"/>
-                  </a:lnTo>
-                  <a:lnTo>
-                    <a:pt x="2363543" y="2399140"/>
-                  </a:lnTo>
-                  <a:lnTo>
-                    <a:pt x="2291920" y="2390433"/>
-                  </a:lnTo>
-                  <a:lnTo>
-                    <a:pt x="2220298" y="2381655"/>
-                  </a:lnTo>
-                  <a:lnTo>
-                    <a:pt x="2148675" y="2372807"/>
-                  </a:lnTo>
-                  <a:lnTo>
-                    <a:pt x="2077053" y="2363888"/>
-                  </a:lnTo>
-                  <a:lnTo>
-                    <a:pt x="2005430" y="2354897"/>
-                  </a:lnTo>
-                  <a:lnTo>
-                    <a:pt x="1933808" y="2345834"/>
-                  </a:lnTo>
-                  <a:lnTo>
-                    <a:pt x="1862185" y="2336698"/>
-                  </a:lnTo>
-                  <a:lnTo>
-                    <a:pt x="1790563" y="2327489"/>
-                  </a:lnTo>
-                  <a:lnTo>
-                    <a:pt x="1718940" y="2318206"/>
-                  </a:lnTo>
-                  <a:lnTo>
-                    <a:pt x="1647318" y="2308849"/>
-                  </a:lnTo>
-                  <a:lnTo>
-                    <a:pt x="1575695" y="2299416"/>
-                  </a:lnTo>
-                  <a:lnTo>
-                    <a:pt x="1504073" y="2289908"/>
-                  </a:lnTo>
-                  <a:lnTo>
-                    <a:pt x="1432450" y="2280323"/>
-                  </a:lnTo>
-                  <a:lnTo>
-                    <a:pt x="1360827" y="2270661"/>
-                  </a:lnTo>
-                  <a:lnTo>
-                    <a:pt x="1289205" y="2260922"/>
-                  </a:lnTo>
-                  <a:lnTo>
-                    <a:pt x="1217582" y="2251105"/>
-                  </a:lnTo>
-                  <a:lnTo>
-                    <a:pt x="1145960" y="2241208"/>
-                  </a:lnTo>
-                  <a:lnTo>
-                    <a:pt x="1074337" y="2231233"/>
-                  </a:lnTo>
-                  <a:lnTo>
-                    <a:pt x="1002715" y="2221177"/>
-                  </a:lnTo>
-                  <a:lnTo>
-                    <a:pt x="931092" y="2211040"/>
-                  </a:lnTo>
-                  <a:lnTo>
-                    <a:pt x="859470" y="2200822"/>
-                  </a:lnTo>
-                  <a:lnTo>
-                    <a:pt x="787847" y="2190522"/>
-                  </a:lnTo>
-                  <a:lnTo>
-                    <a:pt x="716225" y="2180140"/>
-                  </a:lnTo>
-                  <a:lnTo>
-                    <a:pt x="644602" y="2169674"/>
-                  </a:lnTo>
-                  <a:lnTo>
-                    <a:pt x="572980" y="2159124"/>
-                  </a:lnTo>
-                  <a:lnTo>
-                    <a:pt x="501357" y="2148489"/>
-                  </a:lnTo>
-                  <a:lnTo>
-                    <a:pt x="429735" y="2137769"/>
-                  </a:lnTo>
-                  <a:lnTo>
-                    <a:pt x="358112" y="2126963"/>
-                  </a:lnTo>
-                  <a:lnTo>
-                    <a:pt x="286490" y="2116070"/>
-                  </a:lnTo>
-                  <a:lnTo>
-                    <a:pt x="214867" y="2105089"/>
-                  </a:lnTo>
-                  <a:lnTo>
-                    <a:pt x="143245" y="2094021"/>
-                  </a:lnTo>
-                  <a:lnTo>
-                    <a:pt x="71622" y="2082863"/>
-                  </a:lnTo>
-                  <a:lnTo>
-                    <a:pt x="0" y="2071616"/>
+                    <a:pt x="1289205" y="59927"/>
+                  </a:lnTo>
+                  <a:lnTo>
+                    <a:pt x="1360827" y="158484"/>
+                  </a:lnTo>
+                  <a:lnTo>
+                    <a:pt x="1432450" y="254204"/>
+                  </a:lnTo>
+                  <a:lnTo>
+                    <a:pt x="1504073" y="347168"/>
+                  </a:lnTo>
+                  <a:lnTo>
+                    <a:pt x="1575695" y="437457"/>
+                  </a:lnTo>
+                  <a:lnTo>
+                    <a:pt x="1647318" y="525146"/>
+                  </a:lnTo>
+                  <a:lnTo>
+                    <a:pt x="1718940" y="610311"/>
+                  </a:lnTo>
+                  <a:lnTo>
+                    <a:pt x="1790563" y="693025"/>
+                  </a:lnTo>
+                  <a:lnTo>
+                    <a:pt x="1862185" y="773358"/>
+                  </a:lnTo>
+                  <a:lnTo>
+                    <a:pt x="1933808" y="851378"/>
+                  </a:lnTo>
+                  <a:lnTo>
+                    <a:pt x="2005430" y="927153"/>
+                  </a:lnTo>
+                  <a:lnTo>
+                    <a:pt x="2077053" y="1000746"/>
+                  </a:lnTo>
+                  <a:lnTo>
+                    <a:pt x="2148675" y="1072221"/>
+                  </a:lnTo>
+                  <a:lnTo>
+                    <a:pt x="2220298" y="1141638"/>
+                  </a:lnTo>
+                  <a:lnTo>
+                    <a:pt x="2291920" y="1209057"/>
+                  </a:lnTo>
+                  <a:lnTo>
+                    <a:pt x="2363543" y="1274536"/>
+                  </a:lnTo>
+                  <a:lnTo>
+                    <a:pt x="2435165" y="1338129"/>
+                  </a:lnTo>
+                  <a:lnTo>
+                    <a:pt x="2506788" y="1399892"/>
+                  </a:lnTo>
+                  <a:lnTo>
+                    <a:pt x="2578410" y="1459878"/>
+                  </a:lnTo>
+                  <a:lnTo>
+                    <a:pt x="2650033" y="1518136"/>
+                  </a:lnTo>
+                  <a:lnTo>
+                    <a:pt x="2721655" y="1574717"/>
+                  </a:lnTo>
+                  <a:lnTo>
+                    <a:pt x="2793278" y="1629670"/>
+                  </a:lnTo>
+                  <a:lnTo>
+                    <a:pt x="2864901" y="1683041"/>
+                  </a:lnTo>
+                  <a:lnTo>
+                    <a:pt x="2936523" y="1734875"/>
+                  </a:lnTo>
+                  <a:lnTo>
+                    <a:pt x="3008146" y="1785218"/>
+                  </a:lnTo>
+                  <a:lnTo>
+                    <a:pt x="3079768" y="1834111"/>
+                  </a:lnTo>
+                  <a:lnTo>
+                    <a:pt x="3151391" y="1881597"/>
+                  </a:lnTo>
+                  <a:lnTo>
+                    <a:pt x="3223013" y="1927716"/>
+                  </a:lnTo>
+                  <a:lnTo>
+                    <a:pt x="3294636" y="1972507"/>
+                  </a:lnTo>
+                  <a:lnTo>
+                    <a:pt x="3366258" y="2016009"/>
+                  </a:lnTo>
+                  <a:lnTo>
+                    <a:pt x="3437881" y="2058259"/>
+                  </a:lnTo>
+                  <a:lnTo>
+                    <a:pt x="3509503" y="2099293"/>
+                  </a:lnTo>
+                  <a:lnTo>
+                    <a:pt x="3581126" y="2139145"/>
+                  </a:lnTo>
+                  <a:lnTo>
+                    <a:pt x="3652748" y="2177850"/>
+                  </a:lnTo>
+                  <a:lnTo>
+                    <a:pt x="3724371" y="2215441"/>
+                  </a:lnTo>
+                  <a:lnTo>
+                    <a:pt x="3795993" y="2251950"/>
+                  </a:lnTo>
+                  <a:lnTo>
+                    <a:pt x="3867616" y="2287408"/>
+                  </a:lnTo>
+                  <a:lnTo>
+                    <a:pt x="3939238" y="2321846"/>
+                  </a:lnTo>
+                  <a:lnTo>
+                    <a:pt x="4010861" y="2355292"/>
+                  </a:lnTo>
+                  <a:lnTo>
+                    <a:pt x="4082483" y="2387775"/>
+                  </a:lnTo>
+                  <a:lnTo>
+                    <a:pt x="4154106" y="2419323"/>
+                  </a:lnTo>
+                  <a:lnTo>
+                    <a:pt x="4225729" y="2449964"/>
+                  </a:lnTo>
+                  <a:lnTo>
+                    <a:pt x="4297351" y="2479722"/>
+                  </a:lnTo>
+                  <a:lnTo>
+                    <a:pt x="4368974" y="2508623"/>
+                  </a:lnTo>
+                  <a:lnTo>
+                    <a:pt x="4440596" y="2536693"/>
+                  </a:lnTo>
+                  <a:lnTo>
+                    <a:pt x="4512219" y="2563954"/>
+                  </a:lnTo>
+                  <a:lnTo>
+                    <a:pt x="4583841" y="2590431"/>
+                  </a:lnTo>
+                  <a:lnTo>
+                    <a:pt x="4655464" y="2616146"/>
+                  </a:lnTo>
+                  <a:lnTo>
+                    <a:pt x="4727086" y="2641120"/>
+                  </a:lnTo>
+                  <a:lnTo>
+                    <a:pt x="4798709" y="2657403"/>
+                  </a:lnTo>
+                  <a:lnTo>
+                    <a:pt x="4870331" y="2664131"/>
+                  </a:lnTo>
+                  <a:lnTo>
+                    <a:pt x="4941954" y="2670804"/>
+                  </a:lnTo>
+                  <a:lnTo>
+                    <a:pt x="5013576" y="2677422"/>
+                  </a:lnTo>
+                  <a:lnTo>
+                    <a:pt x="5085199" y="2683987"/>
+                  </a:lnTo>
+                  <a:lnTo>
+                    <a:pt x="5156821" y="2690499"/>
+                  </a:lnTo>
+                  <a:lnTo>
+                    <a:pt x="5228444" y="2696957"/>
+                  </a:lnTo>
+                  <a:lnTo>
+                    <a:pt x="5300066" y="2703363"/>
+                  </a:lnTo>
+                  <a:lnTo>
+                    <a:pt x="5371689" y="2709717"/>
+                  </a:lnTo>
+                  <a:lnTo>
+                    <a:pt x="5443311" y="2716019"/>
+                  </a:lnTo>
+                  <a:lnTo>
+                    <a:pt x="5514934" y="2722269"/>
+                  </a:lnTo>
+                  <a:lnTo>
+                    <a:pt x="5586557" y="2728469"/>
+                  </a:lnTo>
+                  <a:lnTo>
+                    <a:pt x="5658179" y="2734618"/>
+                  </a:lnTo>
+                  <a:lnTo>
+                    <a:pt x="5729802" y="2740717"/>
+                  </a:lnTo>
+                  <a:lnTo>
+                    <a:pt x="5801424" y="2746767"/>
+                  </a:lnTo>
+                  <a:lnTo>
+                    <a:pt x="5873047" y="2752767"/>
+                  </a:lnTo>
+                  <a:lnTo>
+                    <a:pt x="5944669" y="2758719"/>
+                  </a:lnTo>
+                  <a:lnTo>
+                    <a:pt x="6016292" y="2764622"/>
+                  </a:lnTo>
+                  <a:lnTo>
+                    <a:pt x="6087914" y="2770477"/>
+                  </a:lnTo>
+                  <a:lnTo>
+                    <a:pt x="6159537" y="2776284"/>
+                  </a:lnTo>
+                  <a:lnTo>
+                    <a:pt x="6231159" y="2782044"/>
+                  </a:lnTo>
+                  <a:lnTo>
+                    <a:pt x="6302782" y="2787757"/>
+                  </a:lnTo>
+                  <a:lnTo>
+                    <a:pt x="6374404" y="2793423"/>
+                  </a:lnTo>
+                  <a:lnTo>
+                    <a:pt x="6446027" y="2799044"/>
+                  </a:lnTo>
+                  <a:lnTo>
+                    <a:pt x="6517649" y="2804618"/>
+                  </a:lnTo>
+                  <a:lnTo>
+                    <a:pt x="6589272" y="2810148"/>
+                  </a:lnTo>
+                  <a:lnTo>
+                    <a:pt x="6660894" y="2815632"/>
+                  </a:lnTo>
+                  <a:lnTo>
+                    <a:pt x="6732517" y="2821072"/>
+                  </a:lnTo>
+                  <a:lnTo>
+                    <a:pt x="6804139" y="2826467"/>
+                  </a:lnTo>
+                  <a:lnTo>
+                    <a:pt x="6875762" y="2831818"/>
+                  </a:lnTo>
+                  <a:lnTo>
+                    <a:pt x="6947385" y="2837126"/>
+                  </a:lnTo>
+                  <a:lnTo>
+                    <a:pt x="7019007" y="2842391"/>
+                  </a:lnTo>
+                  <a:lnTo>
+                    <a:pt x="7090630" y="2847612"/>
+                  </a:lnTo>
+                  <a:lnTo>
+                    <a:pt x="7090630" y="3162356"/>
+                  </a:lnTo>
+                  <a:lnTo>
+                    <a:pt x="7019007" y="3152831"/>
+                  </a:lnTo>
+                  <a:lnTo>
+                    <a:pt x="6947385" y="3143023"/>
+                  </a:lnTo>
+                  <a:lnTo>
+                    <a:pt x="6875762" y="3132924"/>
+                  </a:lnTo>
+                  <a:lnTo>
+                    <a:pt x="6804139" y="3122526"/>
+                  </a:lnTo>
+                  <a:lnTo>
+                    <a:pt x="6732517" y="3111820"/>
+                  </a:lnTo>
+                  <a:lnTo>
+                    <a:pt x="6660894" y="3100796"/>
+                  </a:lnTo>
+                  <a:lnTo>
+                    <a:pt x="6589272" y="3089446"/>
+                  </a:lnTo>
+                  <a:lnTo>
+                    <a:pt x="6517649" y="3077760"/>
+                  </a:lnTo>
+                  <a:lnTo>
+                    <a:pt x="6446027" y="3065727"/>
+                  </a:lnTo>
+                  <a:lnTo>
+                    <a:pt x="6374404" y="3053337"/>
+                  </a:lnTo>
+                  <a:lnTo>
+                    <a:pt x="6302782" y="3040580"/>
+                  </a:lnTo>
+                  <a:lnTo>
+                    <a:pt x="6231159" y="3027445"/>
+                  </a:lnTo>
+                  <a:lnTo>
+                    <a:pt x="6159537" y="3013921"/>
+                  </a:lnTo>
+                  <a:lnTo>
+                    <a:pt x="6087914" y="2999996"/>
+                  </a:lnTo>
+                  <a:lnTo>
+                    <a:pt x="6016292" y="2985658"/>
+                  </a:lnTo>
+                  <a:lnTo>
+                    <a:pt x="5944669" y="2970895"/>
+                  </a:lnTo>
+                  <a:lnTo>
+                    <a:pt x="5873047" y="2955695"/>
+                  </a:lnTo>
+                  <a:lnTo>
+                    <a:pt x="5801424" y="2940044"/>
+                  </a:lnTo>
+                  <a:lnTo>
+                    <a:pt x="5729802" y="2923929"/>
+                  </a:lnTo>
+                  <a:lnTo>
+                    <a:pt x="5658179" y="2907337"/>
+                  </a:lnTo>
+                  <a:lnTo>
+                    <a:pt x="5586557" y="2890253"/>
+                  </a:lnTo>
+                  <a:lnTo>
+                    <a:pt x="5514934" y="2872663"/>
+                  </a:lnTo>
+                  <a:lnTo>
+                    <a:pt x="5443311" y="2854551"/>
+                  </a:lnTo>
+                  <a:lnTo>
+                    <a:pt x="5371689" y="2835902"/>
+                  </a:lnTo>
+                  <a:lnTo>
+                    <a:pt x="5300066" y="2816701"/>
+                  </a:lnTo>
+                  <a:lnTo>
+                    <a:pt x="5228444" y="2796930"/>
+                  </a:lnTo>
+                  <a:lnTo>
+                    <a:pt x="5156821" y="2776574"/>
+                  </a:lnTo>
+                  <a:lnTo>
+                    <a:pt x="5085199" y="2755614"/>
+                  </a:lnTo>
+                  <a:lnTo>
+                    <a:pt x="5013576" y="2734033"/>
+                  </a:lnTo>
+                  <a:lnTo>
+                    <a:pt x="4941954" y="2711812"/>
+                  </a:lnTo>
+                  <a:lnTo>
+                    <a:pt x="4870331" y="2688933"/>
+                  </a:lnTo>
+                  <a:lnTo>
+                    <a:pt x="4798709" y="2665376"/>
+                  </a:lnTo>
+                  <a:lnTo>
+                    <a:pt x="4727086" y="2650620"/>
+                  </a:lnTo>
+                  <a:lnTo>
+                    <a:pt x="4655464" y="2643781"/>
+                  </a:lnTo>
+                  <a:lnTo>
+                    <a:pt x="4583841" y="2636886"/>
+                  </a:lnTo>
+                  <a:lnTo>
+                    <a:pt x="4512219" y="2629934"/>
+                  </a:lnTo>
+                  <a:lnTo>
+                    <a:pt x="4440596" y="2622926"/>
+                  </a:lnTo>
+                  <a:lnTo>
+                    <a:pt x="4368974" y="2615860"/>
+                  </a:lnTo>
+                  <a:lnTo>
+                    <a:pt x="4297351" y="2608736"/>
+                  </a:lnTo>
+                  <a:lnTo>
+                    <a:pt x="4225729" y="2601553"/>
+                  </a:lnTo>
+                  <a:lnTo>
+                    <a:pt x="4154106" y="2594312"/>
+                  </a:lnTo>
+                  <a:lnTo>
+                    <a:pt x="4082483" y="2587011"/>
+                  </a:lnTo>
+                  <a:lnTo>
+                    <a:pt x="4010861" y="2579650"/>
+                  </a:lnTo>
+                  <a:lnTo>
+                    <a:pt x="3939238" y="2572228"/>
+                  </a:lnTo>
+                  <a:lnTo>
+                    <a:pt x="3867616" y="2564746"/>
+                  </a:lnTo>
+                  <a:lnTo>
+                    <a:pt x="3795993" y="2557202"/>
+                  </a:lnTo>
+                  <a:lnTo>
+                    <a:pt x="3724371" y="2549597"/>
+                  </a:lnTo>
+                  <a:lnTo>
+                    <a:pt x="3652748" y="2541929"/>
+                  </a:lnTo>
+                  <a:lnTo>
+                    <a:pt x="3581126" y="2534198"/>
+                  </a:lnTo>
+                  <a:lnTo>
+                    <a:pt x="3509503" y="2526404"/>
+                  </a:lnTo>
+                  <a:lnTo>
+                    <a:pt x="3437881" y="2518545"/>
+                  </a:lnTo>
+                  <a:lnTo>
+                    <a:pt x="3366258" y="2510622"/>
+                  </a:lnTo>
+                  <a:lnTo>
+                    <a:pt x="3294636" y="2502634"/>
+                  </a:lnTo>
+                  <a:lnTo>
+                    <a:pt x="3223013" y="2494581"/>
+                  </a:lnTo>
+                  <a:lnTo>
+                    <a:pt x="3151391" y="2486461"/>
+                  </a:lnTo>
+                  <a:lnTo>
+                    <a:pt x="3079768" y="2478275"/>
+                  </a:lnTo>
+                  <a:lnTo>
+                    <a:pt x="3008146" y="2470021"/>
+                  </a:lnTo>
+                  <a:lnTo>
+                    <a:pt x="2936523" y="2461700"/>
+                  </a:lnTo>
+                  <a:lnTo>
+                    <a:pt x="2864901" y="2453311"/>
+                  </a:lnTo>
+                  <a:lnTo>
+                    <a:pt x="2793278" y="2444852"/>
+                  </a:lnTo>
+                  <a:lnTo>
+                    <a:pt x="2721655" y="2436324"/>
+                  </a:lnTo>
+                  <a:lnTo>
+                    <a:pt x="2650033" y="2427727"/>
+                  </a:lnTo>
+                  <a:lnTo>
+                    <a:pt x="2578410" y="2419058"/>
+                  </a:lnTo>
+                  <a:lnTo>
+                    <a:pt x="2506788" y="2410319"/>
+                  </a:lnTo>
+                  <a:lnTo>
+                    <a:pt x="2435165" y="2401507"/>
+                  </a:lnTo>
+                  <a:lnTo>
+                    <a:pt x="2363543" y="2392624"/>
+                  </a:lnTo>
+                  <a:lnTo>
+                    <a:pt x="2291920" y="2383667"/>
+                  </a:lnTo>
+                  <a:lnTo>
+                    <a:pt x="2220298" y="2374637"/>
+                  </a:lnTo>
+                  <a:lnTo>
+                    <a:pt x="2148675" y="2365533"/>
+                  </a:lnTo>
+                  <a:lnTo>
+                    <a:pt x="2077053" y="2356354"/>
+                  </a:lnTo>
+                  <a:lnTo>
+                    <a:pt x="2005430" y="2347100"/>
+                  </a:lnTo>
+                  <a:lnTo>
+                    <a:pt x="1933808" y="2337770"/>
+                  </a:lnTo>
+                  <a:lnTo>
+                    <a:pt x="1862185" y="2328363"/>
+                  </a:lnTo>
+                  <a:lnTo>
+                    <a:pt x="1790563" y="2318879"/>
+                  </a:lnTo>
+                  <a:lnTo>
+                    <a:pt x="1718940" y="2309317"/>
+                  </a:lnTo>
+                  <a:lnTo>
+                    <a:pt x="1647318" y="2299676"/>
+                  </a:lnTo>
+                  <a:lnTo>
+                    <a:pt x="1575695" y="2289957"/>
+                  </a:lnTo>
+                  <a:lnTo>
+                    <a:pt x="1504073" y="2280158"/>
+                  </a:lnTo>
+                  <a:lnTo>
+                    <a:pt x="1432450" y="2270278"/>
+                  </a:lnTo>
+                  <a:lnTo>
+                    <a:pt x="1360827" y="2260317"/>
+                  </a:lnTo>
+                  <a:lnTo>
+                    <a:pt x="1289205" y="2250274"/>
+                  </a:lnTo>
+                  <a:lnTo>
+                    <a:pt x="1217582" y="2240149"/>
+                  </a:lnTo>
+                  <a:lnTo>
+                    <a:pt x="1145960" y="2229941"/>
+                  </a:lnTo>
+                  <a:lnTo>
+                    <a:pt x="1074337" y="2219649"/>
+                  </a:lnTo>
+                  <a:lnTo>
+                    <a:pt x="1002715" y="2209273"/>
+                  </a:lnTo>
+                  <a:lnTo>
+                    <a:pt x="931092" y="2198811"/>
+                  </a:lnTo>
+                  <a:lnTo>
+                    <a:pt x="859470" y="2188264"/>
+                  </a:lnTo>
+                  <a:lnTo>
+                    <a:pt x="787847" y="2177630"/>
+                  </a:lnTo>
+                  <a:lnTo>
+                    <a:pt x="716225" y="2166909"/>
+                  </a:lnTo>
+                  <a:lnTo>
+                    <a:pt x="644602" y="2156099"/>
+                  </a:lnTo>
+                  <a:lnTo>
+                    <a:pt x="572980" y="2145201"/>
+                  </a:lnTo>
+                  <a:lnTo>
+                    <a:pt x="501357" y="2134214"/>
+                  </a:lnTo>
+                  <a:lnTo>
+                    <a:pt x="429735" y="2123136"/>
+                  </a:lnTo>
+                  <a:lnTo>
+                    <a:pt x="358112" y="2111967"/>
+                  </a:lnTo>
+                  <a:lnTo>
+                    <a:pt x="286490" y="2100707"/>
+                  </a:lnTo>
+                  <a:lnTo>
+                    <a:pt x="214867" y="2089354"/>
+                  </a:lnTo>
+                  <a:lnTo>
+                    <a:pt x="143245" y="2077908"/>
+                  </a:lnTo>
+                  <a:lnTo>
+                    <a:pt x="71622" y="2066368"/>
+                  </a:lnTo>
+                  <a:lnTo>
+                    <a:pt x="0" y="2054734"/>
                   </a:lnTo>
                   <a:close/>
                 </a:path>
@@ -3625,261 +3625,261 @@
           </p:nvSpPr>
           <p:spPr>
             <a:xfrm>
-              <a:off x="2409066" y="2073503"/>
-              <a:ext cx="5853613" cy="2843914"/>
+              <a:off x="2418958" y="2073503"/>
+              <a:ext cx="5843720" cy="2847612"/>
             </a:xfrm>
             <a:custGeom>
               <a:avLst/>
               <a:pathLst>
-                <a:path w="5853613" h="2843914">
+                <a:path w="5843720" h="2847612">
                   <a:moveTo>
                     <a:pt x="0" y="0"/>
                   </a:moveTo>
                   <a:lnTo>
-                    <a:pt x="52188" y="73443"/>
-                  </a:lnTo>
-                  <a:lnTo>
-                    <a:pt x="123811" y="171341"/>
-                  </a:lnTo>
-                  <a:lnTo>
-                    <a:pt x="195433" y="266428"/>
-                  </a:lnTo>
-                  <a:lnTo>
-                    <a:pt x="267056" y="358786"/>
-                  </a:lnTo>
-                  <a:lnTo>
-                    <a:pt x="338678" y="448493"/>
-                  </a:lnTo>
-                  <a:lnTo>
-                    <a:pt x="410301" y="535624"/>
-                  </a:lnTo>
-                  <a:lnTo>
-                    <a:pt x="481923" y="620255"/>
-                  </a:lnTo>
-                  <a:lnTo>
-                    <a:pt x="553546" y="702456"/>
-                  </a:lnTo>
-                  <a:lnTo>
-                    <a:pt x="625169" y="782297"/>
-                  </a:lnTo>
-                  <a:lnTo>
-                    <a:pt x="696791" y="859846"/>
-                  </a:lnTo>
-                  <a:lnTo>
-                    <a:pt x="768414" y="935169"/>
-                  </a:lnTo>
-                  <a:lnTo>
-                    <a:pt x="840036" y="1008330"/>
-                  </a:lnTo>
-                  <a:lnTo>
-                    <a:pt x="911659" y="1079390"/>
-                  </a:lnTo>
-                  <a:lnTo>
-                    <a:pt x="983281" y="1148411"/>
-                  </a:lnTo>
-                  <a:lnTo>
-                    <a:pt x="1054904" y="1215451"/>
-                  </a:lnTo>
-                  <a:lnTo>
-                    <a:pt x="1126526" y="1280565"/>
-                  </a:lnTo>
-                  <a:lnTo>
-                    <a:pt x="1198149" y="1343811"/>
-                  </a:lnTo>
-                  <a:lnTo>
-                    <a:pt x="1269771" y="1405241"/>
-                  </a:lnTo>
-                  <a:lnTo>
-                    <a:pt x="1341394" y="1464908"/>
-                  </a:lnTo>
-                  <a:lnTo>
-                    <a:pt x="1413016" y="1522862"/>
-                  </a:lnTo>
-                  <a:lnTo>
-                    <a:pt x="1484639" y="1579152"/>
-                  </a:lnTo>
-                  <a:lnTo>
-                    <a:pt x="1556261" y="1633826"/>
-                  </a:lnTo>
-                  <a:lnTo>
-                    <a:pt x="1627884" y="1686931"/>
-                  </a:lnTo>
-                  <a:lnTo>
-                    <a:pt x="1699506" y="1738511"/>
-                  </a:lnTo>
-                  <a:lnTo>
-                    <a:pt x="1771129" y="1788611"/>
-                  </a:lnTo>
-                  <a:lnTo>
-                    <a:pt x="1842751" y="1837272"/>
-                  </a:lnTo>
-                  <a:lnTo>
-                    <a:pt x="1914374" y="1884537"/>
-                  </a:lnTo>
-                  <a:lnTo>
-                    <a:pt x="1985997" y="1930445"/>
-                  </a:lnTo>
-                  <a:lnTo>
-                    <a:pt x="2057619" y="1975034"/>
-                  </a:lnTo>
-                  <a:lnTo>
-                    <a:pt x="2129242" y="2018344"/>
-                  </a:lnTo>
-                  <a:lnTo>
-                    <a:pt x="2200864" y="2060411"/>
-                  </a:lnTo>
-                  <a:lnTo>
-                    <a:pt x="2272487" y="2101270"/>
-                  </a:lnTo>
-                  <a:lnTo>
-                    <a:pt x="2344109" y="2140956"/>
-                  </a:lnTo>
-                  <a:lnTo>
-                    <a:pt x="2415732" y="2179503"/>
-                  </a:lnTo>
-                  <a:lnTo>
-                    <a:pt x="2487354" y="2216943"/>
-                  </a:lnTo>
-                  <a:lnTo>
-                    <a:pt x="2558977" y="2253309"/>
-                  </a:lnTo>
-                  <a:lnTo>
-                    <a:pt x="2630599" y="2288630"/>
-                  </a:lnTo>
-                  <a:lnTo>
-                    <a:pt x="2702222" y="2322938"/>
-                  </a:lnTo>
-                  <a:lnTo>
-                    <a:pt x="2773844" y="2356261"/>
-                  </a:lnTo>
-                  <a:lnTo>
-                    <a:pt x="2845467" y="2388627"/>
-                  </a:lnTo>
-                  <a:lnTo>
-                    <a:pt x="2917089" y="2420064"/>
-                  </a:lnTo>
-                  <a:lnTo>
-                    <a:pt x="2988712" y="2450598"/>
-                  </a:lnTo>
-                  <a:lnTo>
-                    <a:pt x="3060334" y="2480257"/>
-                  </a:lnTo>
-                  <a:lnTo>
-                    <a:pt x="3131957" y="2509063"/>
-                  </a:lnTo>
-                  <a:lnTo>
-                    <a:pt x="3203579" y="2537043"/>
-                  </a:lnTo>
-                  <a:lnTo>
-                    <a:pt x="3275202" y="2564220"/>
-                  </a:lnTo>
-                  <a:lnTo>
-                    <a:pt x="3346825" y="2590616"/>
-                  </a:lnTo>
-                  <a:lnTo>
-                    <a:pt x="3418447" y="2616255"/>
-                  </a:lnTo>
-                  <a:lnTo>
-                    <a:pt x="3490070" y="2641157"/>
-                  </a:lnTo>
-                  <a:lnTo>
-                    <a:pt x="3561692" y="2657335"/>
-                  </a:lnTo>
-                  <a:lnTo>
-                    <a:pt x="3633315" y="2663917"/>
-                  </a:lnTo>
-                  <a:lnTo>
-                    <a:pt x="3704937" y="2670446"/>
-                  </a:lnTo>
-                  <a:lnTo>
-                    <a:pt x="3776560" y="2676924"/>
-                  </a:lnTo>
-                  <a:lnTo>
-                    <a:pt x="3848182" y="2683350"/>
-                  </a:lnTo>
-                  <a:lnTo>
-                    <a:pt x="3919805" y="2689725"/>
-                  </a:lnTo>
-                  <a:lnTo>
-                    <a:pt x="3991427" y="2696049"/>
-                  </a:lnTo>
-                  <a:lnTo>
-                    <a:pt x="4063050" y="2702322"/>
-                  </a:lnTo>
-                  <a:lnTo>
-                    <a:pt x="4134672" y="2708546"/>
-                  </a:lnTo>
-                  <a:lnTo>
-                    <a:pt x="4206295" y="2714720"/>
-                  </a:lnTo>
-                  <a:lnTo>
-                    <a:pt x="4277917" y="2720845"/>
-                  </a:lnTo>
-                  <a:lnTo>
-                    <a:pt x="4349540" y="2726921"/>
-                  </a:lnTo>
-                  <a:lnTo>
-                    <a:pt x="4421162" y="2732949"/>
-                  </a:lnTo>
-                  <a:lnTo>
-                    <a:pt x="4492785" y="2738929"/>
-                  </a:lnTo>
-                  <a:lnTo>
-                    <a:pt x="4564407" y="2744861"/>
-                  </a:lnTo>
-                  <a:lnTo>
-                    <a:pt x="4636030" y="2750746"/>
-                  </a:lnTo>
-                  <a:lnTo>
-                    <a:pt x="4707653" y="2756584"/>
-                  </a:lnTo>
-                  <a:lnTo>
-                    <a:pt x="4779275" y="2762375"/>
-                  </a:lnTo>
-                  <a:lnTo>
-                    <a:pt x="4850898" y="2768121"/>
-                  </a:lnTo>
-                  <a:lnTo>
-                    <a:pt x="4922520" y="2773820"/>
-                  </a:lnTo>
-                  <a:lnTo>
-                    <a:pt x="4994143" y="2779475"/>
-                  </a:lnTo>
-                  <a:lnTo>
-                    <a:pt x="5065765" y="2785084"/>
-                  </a:lnTo>
-                  <a:lnTo>
-                    <a:pt x="5137388" y="2790648"/>
-                  </a:lnTo>
-                  <a:lnTo>
-                    <a:pt x="5209010" y="2796169"/>
-                  </a:lnTo>
-                  <a:lnTo>
-                    <a:pt x="5280633" y="2801645"/>
-                  </a:lnTo>
-                  <a:lnTo>
-                    <a:pt x="5352255" y="2807078"/>
-                  </a:lnTo>
-                  <a:lnTo>
-                    <a:pt x="5423878" y="2812467"/>
-                  </a:lnTo>
-                  <a:lnTo>
-                    <a:pt x="5495500" y="2817813"/>
-                  </a:lnTo>
-                  <a:lnTo>
-                    <a:pt x="5567123" y="2823117"/>
-                  </a:lnTo>
-                  <a:lnTo>
-                    <a:pt x="5638745" y="2828379"/>
-                  </a:lnTo>
-                  <a:lnTo>
-                    <a:pt x="5710368" y="2833598"/>
-                  </a:lnTo>
-                  <a:lnTo>
-                    <a:pt x="5781990" y="2838777"/>
-                  </a:lnTo>
-                  <a:lnTo>
-                    <a:pt x="5853613" y="2843914"/>
+                    <a:pt x="42296" y="59927"/>
+                  </a:lnTo>
+                  <a:lnTo>
+                    <a:pt x="113918" y="158484"/>
+                  </a:lnTo>
+                  <a:lnTo>
+                    <a:pt x="185541" y="254204"/>
+                  </a:lnTo>
+                  <a:lnTo>
+                    <a:pt x="257163" y="347168"/>
+                  </a:lnTo>
+                  <a:lnTo>
+                    <a:pt x="328786" y="437457"/>
+                  </a:lnTo>
+                  <a:lnTo>
+                    <a:pt x="400409" y="525146"/>
+                  </a:lnTo>
+                  <a:lnTo>
+                    <a:pt x="472031" y="610311"/>
+                  </a:lnTo>
+                  <a:lnTo>
+                    <a:pt x="543654" y="693025"/>
+                  </a:lnTo>
+                  <a:lnTo>
+                    <a:pt x="615276" y="773358"/>
+                  </a:lnTo>
+                  <a:lnTo>
+                    <a:pt x="686899" y="851378"/>
+                  </a:lnTo>
+                  <a:lnTo>
+                    <a:pt x="758521" y="927153"/>
+                  </a:lnTo>
+                  <a:lnTo>
+                    <a:pt x="830144" y="1000746"/>
+                  </a:lnTo>
+                  <a:lnTo>
+                    <a:pt x="901766" y="1072221"/>
+                  </a:lnTo>
+                  <a:lnTo>
+                    <a:pt x="973389" y="1141638"/>
+                  </a:lnTo>
+                  <a:lnTo>
+                    <a:pt x="1045011" y="1209057"/>
+                  </a:lnTo>
+                  <a:lnTo>
+                    <a:pt x="1116634" y="1274536"/>
+                  </a:lnTo>
+                  <a:lnTo>
+                    <a:pt x="1188256" y="1338129"/>
+                  </a:lnTo>
+                  <a:lnTo>
+                    <a:pt x="1259879" y="1399892"/>
+                  </a:lnTo>
+                  <a:lnTo>
+                    <a:pt x="1331501" y="1459878"/>
+                  </a:lnTo>
+                  <a:lnTo>
+                    <a:pt x="1403124" y="1518136"/>
+                  </a:lnTo>
+                  <a:lnTo>
+                    <a:pt x="1474746" y="1574717"/>
+                  </a:lnTo>
+                  <a:lnTo>
+                    <a:pt x="1546369" y="1629670"/>
+                  </a:lnTo>
+                  <a:lnTo>
+                    <a:pt x="1617991" y="1683041"/>
+                  </a:lnTo>
+                  <a:lnTo>
+                    <a:pt x="1689614" y="1734875"/>
+                  </a:lnTo>
+                  <a:lnTo>
+                    <a:pt x="1761237" y="1785218"/>
+                  </a:lnTo>
+                  <a:lnTo>
+                    <a:pt x="1832859" y="1834111"/>
+                  </a:lnTo>
+                  <a:lnTo>
+                    <a:pt x="1904482" y="1881597"/>
+                  </a:lnTo>
+                  <a:lnTo>
+                    <a:pt x="1976104" y="1927716"/>
+                  </a:lnTo>
+                  <a:lnTo>
+                    <a:pt x="2047727" y="1972507"/>
+                  </a:lnTo>
+                  <a:lnTo>
+                    <a:pt x="2119349" y="2016009"/>
+                  </a:lnTo>
+                  <a:lnTo>
+                    <a:pt x="2190972" y="2058259"/>
+                  </a:lnTo>
+                  <a:lnTo>
+                    <a:pt x="2262594" y="2099293"/>
+                  </a:lnTo>
+                  <a:lnTo>
+                    <a:pt x="2334217" y="2139145"/>
+                  </a:lnTo>
+                  <a:lnTo>
+                    <a:pt x="2405839" y="2177850"/>
+                  </a:lnTo>
+                  <a:lnTo>
+                    <a:pt x="2477462" y="2215441"/>
+                  </a:lnTo>
+                  <a:lnTo>
+                    <a:pt x="2549084" y="2251950"/>
+                  </a:lnTo>
+                  <a:lnTo>
+                    <a:pt x="2620707" y="2287408"/>
+                  </a:lnTo>
+                  <a:lnTo>
+                    <a:pt x="2692329" y="2321846"/>
+                  </a:lnTo>
+                  <a:lnTo>
+                    <a:pt x="2763952" y="2355292"/>
+                  </a:lnTo>
+                  <a:lnTo>
+                    <a:pt x="2835574" y="2387775"/>
+                  </a:lnTo>
+                  <a:lnTo>
+                    <a:pt x="2907197" y="2419323"/>
+                  </a:lnTo>
+                  <a:lnTo>
+                    <a:pt x="2978819" y="2449964"/>
+                  </a:lnTo>
+                  <a:lnTo>
+                    <a:pt x="3050442" y="2479722"/>
+                  </a:lnTo>
+                  <a:lnTo>
+                    <a:pt x="3122065" y="2508623"/>
+                  </a:lnTo>
+                  <a:lnTo>
+                    <a:pt x="3193687" y="2536693"/>
+                  </a:lnTo>
+                  <a:lnTo>
+                    <a:pt x="3265310" y="2563954"/>
+                  </a:lnTo>
+                  <a:lnTo>
+                    <a:pt x="3336932" y="2590431"/>
+                  </a:lnTo>
+                  <a:lnTo>
+                    <a:pt x="3408555" y="2616146"/>
+                  </a:lnTo>
+                  <a:lnTo>
+                    <a:pt x="3480177" y="2641120"/>
+                  </a:lnTo>
+                  <a:lnTo>
+                    <a:pt x="3551800" y="2657403"/>
+                  </a:lnTo>
+                  <a:lnTo>
+                    <a:pt x="3623422" y="2664131"/>
+                  </a:lnTo>
+                  <a:lnTo>
+                    <a:pt x="3695045" y="2670804"/>
+                  </a:lnTo>
+                  <a:lnTo>
+                    <a:pt x="3766667" y="2677422"/>
+                  </a:lnTo>
+                  <a:lnTo>
+                    <a:pt x="3838290" y="2683987"/>
+                  </a:lnTo>
+                  <a:lnTo>
+                    <a:pt x="3909912" y="2690499"/>
+                  </a:lnTo>
+                  <a:lnTo>
+                    <a:pt x="3981535" y="2696957"/>
+                  </a:lnTo>
+                  <a:lnTo>
+                    <a:pt x="4053157" y="2703363"/>
+                  </a:lnTo>
+                  <a:lnTo>
+                    <a:pt x="4124780" y="2709717"/>
+                  </a:lnTo>
+                  <a:lnTo>
+                    <a:pt x="4196402" y="2716019"/>
+                  </a:lnTo>
+                  <a:lnTo>
+                    <a:pt x="4268025" y="2722269"/>
+                  </a:lnTo>
+                  <a:lnTo>
+                    <a:pt x="4339647" y="2728469"/>
+                  </a:lnTo>
+                  <a:lnTo>
+                    <a:pt x="4411270" y="2734618"/>
+                  </a:lnTo>
+                  <a:lnTo>
+                    <a:pt x="4482893" y="2740717"/>
+                  </a:lnTo>
+                  <a:lnTo>
+                    <a:pt x="4554515" y="2746767"/>
+                  </a:lnTo>
+                  <a:lnTo>
+                    <a:pt x="4626138" y="2752767"/>
+                  </a:lnTo>
+                  <a:lnTo>
+                    <a:pt x="4697760" y="2758719"/>
+                  </a:lnTo>
+                  <a:lnTo>
+                    <a:pt x="4769383" y="2764622"/>
+                  </a:lnTo>
+                  <a:lnTo>
+                    <a:pt x="4841005" y="2770477"/>
+                  </a:lnTo>
+                  <a:lnTo>
+                    <a:pt x="4912628" y="2776284"/>
+                  </a:lnTo>
+                  <a:lnTo>
+                    <a:pt x="4984250" y="2782044"/>
+                  </a:lnTo>
+                  <a:lnTo>
+                    <a:pt x="5055873" y="2787757"/>
+                  </a:lnTo>
+                  <a:lnTo>
+                    <a:pt x="5127495" y="2793423"/>
+                  </a:lnTo>
+                  <a:lnTo>
+                    <a:pt x="5199118" y="2799044"/>
+                  </a:lnTo>
+                  <a:lnTo>
+                    <a:pt x="5270740" y="2804618"/>
+                  </a:lnTo>
+                  <a:lnTo>
+                    <a:pt x="5342363" y="2810148"/>
+                  </a:lnTo>
+                  <a:lnTo>
+                    <a:pt x="5413985" y="2815632"/>
+                  </a:lnTo>
+                  <a:lnTo>
+                    <a:pt x="5485608" y="2821072"/>
+                  </a:lnTo>
+                  <a:lnTo>
+                    <a:pt x="5557230" y="2826467"/>
+                  </a:lnTo>
+                  <a:lnTo>
+                    <a:pt x="5628853" y="2831818"/>
+                  </a:lnTo>
+                  <a:lnTo>
+                    <a:pt x="5700475" y="2837126"/>
+                  </a:lnTo>
+                  <a:lnTo>
+                    <a:pt x="5772098" y="2842391"/>
+                  </a:lnTo>
+                  <a:lnTo>
+                    <a:pt x="5843720" y="2847612"/>
                   </a:lnTo>
                 </a:path>
               </a:pathLst>
@@ -3899,309 +3899,309 @@
           </p:nvSpPr>
           <p:spPr>
             <a:xfrm>
-              <a:off x="1172049" y="4145119"/>
-              <a:ext cx="7090630" cy="1089888"/>
+              <a:off x="1172049" y="4128237"/>
+              <a:ext cx="7090630" cy="1107622"/>
             </a:xfrm>
             <a:custGeom>
               <a:avLst/>
               <a:pathLst>
-                <a:path w="7090630" h="1089888">
+                <a:path w="7090630" h="1107622">
                   <a:moveTo>
-                    <a:pt x="7090630" y="1089888"/>
+                    <a:pt x="7090630" y="1107622"/>
                   </a:moveTo>
                   <a:lnTo>
-                    <a:pt x="7019007" y="1080364"/>
-                  </a:lnTo>
-                  <a:lnTo>
-                    <a:pt x="6947385" y="1070559"/>
-                  </a:lnTo>
-                  <a:lnTo>
-                    <a:pt x="6875762" y="1060464"/>
-                  </a:lnTo>
-                  <a:lnTo>
-                    <a:pt x="6804139" y="1050070"/>
-                  </a:lnTo>
-                  <a:lnTo>
-                    <a:pt x="6732517" y="1039370"/>
-                  </a:lnTo>
-                  <a:lnTo>
-                    <a:pt x="6660894" y="1028353"/>
-                  </a:lnTo>
-                  <a:lnTo>
-                    <a:pt x="6589272" y="1017010"/>
-                  </a:lnTo>
-                  <a:lnTo>
-                    <a:pt x="6517649" y="1005333"/>
-                  </a:lnTo>
-                  <a:lnTo>
-                    <a:pt x="6446027" y="993310"/>
-                  </a:lnTo>
-                  <a:lnTo>
-                    <a:pt x="6374404" y="980932"/>
-                  </a:lnTo>
-                  <a:lnTo>
-                    <a:pt x="6302782" y="968188"/>
-                  </a:lnTo>
-                  <a:lnTo>
-                    <a:pt x="6231159" y="955067"/>
-                  </a:lnTo>
-                  <a:lnTo>
-                    <a:pt x="6159537" y="941558"/>
-                  </a:lnTo>
-                  <a:lnTo>
-                    <a:pt x="6087914" y="927651"/>
-                  </a:lnTo>
-                  <a:lnTo>
-                    <a:pt x="6016292" y="913332"/>
-                  </a:lnTo>
-                  <a:lnTo>
-                    <a:pt x="5944669" y="898590"/>
-                  </a:lnTo>
-                  <a:lnTo>
-                    <a:pt x="5873047" y="883412"/>
-                  </a:lnTo>
-                  <a:lnTo>
-                    <a:pt x="5801424" y="867786"/>
-                  </a:lnTo>
-                  <a:lnTo>
-                    <a:pt x="5729802" y="851698"/>
-                  </a:lnTo>
-                  <a:lnTo>
-                    <a:pt x="5658179" y="835135"/>
-                  </a:lnTo>
-                  <a:lnTo>
-                    <a:pt x="5586557" y="818082"/>
-                  </a:lnTo>
-                  <a:lnTo>
-                    <a:pt x="5514934" y="800525"/>
-                  </a:lnTo>
-                  <a:lnTo>
-                    <a:pt x="5443311" y="782449"/>
-                  </a:lnTo>
-                  <a:lnTo>
-                    <a:pt x="5371689" y="763838"/>
-                  </a:lnTo>
-                  <a:lnTo>
-                    <a:pt x="5300066" y="744678"/>
-                  </a:lnTo>
-                  <a:lnTo>
-                    <a:pt x="5228444" y="724952"/>
-                  </a:lnTo>
-                  <a:lnTo>
-                    <a:pt x="5156821" y="704642"/>
-                  </a:lnTo>
-                  <a:lnTo>
-                    <a:pt x="5085199" y="683732"/>
-                  </a:lnTo>
-                  <a:lnTo>
-                    <a:pt x="5013576" y="662205"/>
-                  </a:lnTo>
-                  <a:lnTo>
-                    <a:pt x="4941954" y="640041"/>
-                  </a:lnTo>
-                  <a:lnTo>
-                    <a:pt x="4870331" y="617222"/>
-                  </a:lnTo>
-                  <a:lnTo>
-                    <a:pt x="4798709" y="593728"/>
-                  </a:lnTo>
-                  <a:lnTo>
-                    <a:pt x="4727086" y="579083"/>
-                  </a:lnTo>
-                  <a:lnTo>
-                    <a:pt x="4655464" y="572395"/>
-                  </a:lnTo>
-                  <a:lnTo>
-                    <a:pt x="4583841" y="565653"/>
-                  </a:lnTo>
-                  <a:lnTo>
-                    <a:pt x="4512219" y="558857"/>
-                  </a:lnTo>
-                  <a:lnTo>
-                    <a:pt x="4440596" y="552007"/>
-                  </a:lnTo>
-                  <a:lnTo>
-                    <a:pt x="4368974" y="545101"/>
-                  </a:lnTo>
-                  <a:lnTo>
-                    <a:pt x="4297351" y="538140"/>
-                  </a:lnTo>
-                  <a:lnTo>
-                    <a:pt x="4225729" y="531123"/>
-                  </a:lnTo>
-                  <a:lnTo>
-                    <a:pt x="4154106" y="524050"/>
-                  </a:lnTo>
-                  <a:lnTo>
-                    <a:pt x="4082483" y="516920"/>
-                  </a:lnTo>
-                  <a:lnTo>
-                    <a:pt x="4010861" y="509733"/>
-                  </a:lnTo>
-                  <a:lnTo>
-                    <a:pt x="3939238" y="502488"/>
-                  </a:lnTo>
-                  <a:lnTo>
-                    <a:pt x="3867616" y="495185"/>
-                  </a:lnTo>
-                  <a:lnTo>
-                    <a:pt x="3795993" y="487823"/>
-                  </a:lnTo>
-                  <a:lnTo>
-                    <a:pt x="3724371" y="480403"/>
-                  </a:lnTo>
-                  <a:lnTo>
-                    <a:pt x="3652748" y="472922"/>
-                  </a:lnTo>
-                  <a:lnTo>
-                    <a:pt x="3581126" y="465382"/>
-                  </a:lnTo>
-                  <a:lnTo>
-                    <a:pt x="3509503" y="457781"/>
-                  </a:lnTo>
-                  <a:lnTo>
-                    <a:pt x="3437881" y="450119"/>
-                  </a:lnTo>
-                  <a:lnTo>
-                    <a:pt x="3366258" y="442395"/>
-                  </a:lnTo>
-                  <a:lnTo>
-                    <a:pt x="3294636" y="434610"/>
-                  </a:lnTo>
-                  <a:lnTo>
-                    <a:pt x="3223013" y="426762"/>
-                  </a:lnTo>
-                  <a:lnTo>
-                    <a:pt x="3151391" y="418851"/>
-                  </a:lnTo>
-                  <a:lnTo>
-                    <a:pt x="3079768" y="410876"/>
-                  </a:lnTo>
-                  <a:lnTo>
-                    <a:pt x="3008146" y="402838"/>
-                  </a:lnTo>
-                  <a:lnTo>
-                    <a:pt x="2936523" y="394735"/>
-                  </a:lnTo>
-                  <a:lnTo>
-                    <a:pt x="2864901" y="386567"/>
-                  </a:lnTo>
-                  <a:lnTo>
-                    <a:pt x="2793278" y="378333"/>
-                  </a:lnTo>
-                  <a:lnTo>
-                    <a:pt x="2721655" y="370033"/>
-                  </a:lnTo>
-                  <a:lnTo>
-                    <a:pt x="2650033" y="361667"/>
-                  </a:lnTo>
-                  <a:lnTo>
-                    <a:pt x="2578410" y="353233"/>
-                  </a:lnTo>
-                  <a:lnTo>
-                    <a:pt x="2506788" y="344732"/>
-                  </a:lnTo>
-                  <a:lnTo>
-                    <a:pt x="2435165" y="336162"/>
-                  </a:lnTo>
-                  <a:lnTo>
-                    <a:pt x="2363543" y="327524"/>
-                  </a:lnTo>
-                  <a:lnTo>
-                    <a:pt x="2291920" y="318816"/>
-                  </a:lnTo>
-                  <a:lnTo>
-                    <a:pt x="2220298" y="310038"/>
-                  </a:lnTo>
-                  <a:lnTo>
-                    <a:pt x="2148675" y="301190"/>
-                  </a:lnTo>
-                  <a:lnTo>
-                    <a:pt x="2077053" y="292271"/>
-                  </a:lnTo>
-                  <a:lnTo>
-                    <a:pt x="2005430" y="283280"/>
-                  </a:lnTo>
-                  <a:lnTo>
-                    <a:pt x="1933808" y="274217"/>
-                  </a:lnTo>
-                  <a:lnTo>
-                    <a:pt x="1862185" y="265081"/>
-                  </a:lnTo>
-                  <a:lnTo>
-                    <a:pt x="1790563" y="255872"/>
-                  </a:lnTo>
-                  <a:lnTo>
-                    <a:pt x="1718940" y="246589"/>
-                  </a:lnTo>
-                  <a:lnTo>
-                    <a:pt x="1647318" y="237232"/>
-                  </a:lnTo>
-                  <a:lnTo>
-                    <a:pt x="1575695" y="227799"/>
-                  </a:lnTo>
-                  <a:lnTo>
-                    <a:pt x="1504073" y="218291"/>
-                  </a:lnTo>
-                  <a:lnTo>
-                    <a:pt x="1432450" y="208706"/>
-                  </a:lnTo>
-                  <a:lnTo>
-                    <a:pt x="1360827" y="199044"/>
-                  </a:lnTo>
-                  <a:lnTo>
-                    <a:pt x="1289205" y="189305"/>
-                  </a:lnTo>
-                  <a:lnTo>
-                    <a:pt x="1217582" y="179488"/>
-                  </a:lnTo>
-                  <a:lnTo>
-                    <a:pt x="1145960" y="169591"/>
-                  </a:lnTo>
-                  <a:lnTo>
-                    <a:pt x="1074337" y="159616"/>
-                  </a:lnTo>
-                  <a:lnTo>
-                    <a:pt x="1002715" y="149560"/>
-                  </a:lnTo>
-                  <a:lnTo>
-                    <a:pt x="931092" y="139423"/>
-                  </a:lnTo>
-                  <a:lnTo>
-                    <a:pt x="859470" y="129205"/>
-                  </a:lnTo>
-                  <a:lnTo>
-                    <a:pt x="787847" y="118905"/>
-                  </a:lnTo>
-                  <a:lnTo>
-                    <a:pt x="716225" y="108523"/>
-                  </a:lnTo>
-                  <a:lnTo>
-                    <a:pt x="644602" y="98057"/>
-                  </a:lnTo>
-                  <a:lnTo>
-                    <a:pt x="572980" y="87507"/>
-                  </a:lnTo>
-                  <a:lnTo>
-                    <a:pt x="501357" y="76872"/>
-                  </a:lnTo>
-                  <a:lnTo>
-                    <a:pt x="429735" y="66152"/>
-                  </a:lnTo>
-                  <a:lnTo>
-                    <a:pt x="358112" y="55346"/>
-                  </a:lnTo>
-                  <a:lnTo>
-                    <a:pt x="286490" y="44453"/>
-                  </a:lnTo>
-                  <a:lnTo>
-                    <a:pt x="214867" y="33472"/>
-                  </a:lnTo>
-                  <a:lnTo>
-                    <a:pt x="143245" y="22404"/>
-                  </a:lnTo>
-                  <a:lnTo>
-                    <a:pt x="71622" y="11246"/>
+                    <a:pt x="7019007" y="1098096"/>
+                  </a:lnTo>
+                  <a:lnTo>
+                    <a:pt x="6947385" y="1088288"/>
+                  </a:lnTo>
+                  <a:lnTo>
+                    <a:pt x="6875762" y="1078190"/>
+                  </a:lnTo>
+                  <a:lnTo>
+                    <a:pt x="6804139" y="1067792"/>
+                  </a:lnTo>
+                  <a:lnTo>
+                    <a:pt x="6732517" y="1057086"/>
+                  </a:lnTo>
+                  <a:lnTo>
+                    <a:pt x="6660894" y="1046062"/>
+                  </a:lnTo>
+                  <a:lnTo>
+                    <a:pt x="6589272" y="1034712"/>
+                  </a:lnTo>
+                  <a:lnTo>
+                    <a:pt x="6517649" y="1023025"/>
+                  </a:lnTo>
+                  <a:lnTo>
+                    <a:pt x="6446027" y="1010992"/>
+                  </a:lnTo>
+                  <a:lnTo>
+                    <a:pt x="6374404" y="998603"/>
+                  </a:lnTo>
+                  <a:lnTo>
+                    <a:pt x="6302782" y="985846"/>
+                  </a:lnTo>
+                  <a:lnTo>
+                    <a:pt x="6231159" y="972711"/>
+                  </a:lnTo>
+                  <a:lnTo>
+                    <a:pt x="6159537" y="959187"/>
+                  </a:lnTo>
+                  <a:lnTo>
+                    <a:pt x="6087914" y="945262"/>
+                  </a:lnTo>
+                  <a:lnTo>
+                    <a:pt x="6016292" y="930924"/>
+                  </a:lnTo>
+                  <a:lnTo>
+                    <a:pt x="5944669" y="916161"/>
+                  </a:lnTo>
+                  <a:lnTo>
+                    <a:pt x="5873047" y="900961"/>
+                  </a:lnTo>
+                  <a:lnTo>
+                    <a:pt x="5801424" y="885310"/>
+                  </a:lnTo>
+                  <a:lnTo>
+                    <a:pt x="5729802" y="869195"/>
+                  </a:lnTo>
+                  <a:lnTo>
+                    <a:pt x="5658179" y="852603"/>
+                  </a:lnTo>
+                  <a:lnTo>
+                    <a:pt x="5586557" y="835519"/>
+                  </a:lnTo>
+                  <a:lnTo>
+                    <a:pt x="5514934" y="817928"/>
+                  </a:lnTo>
+                  <a:lnTo>
+                    <a:pt x="5443311" y="799817"/>
+                  </a:lnTo>
+                  <a:lnTo>
+                    <a:pt x="5371689" y="781168"/>
+                  </a:lnTo>
+                  <a:lnTo>
+                    <a:pt x="5300066" y="761967"/>
+                  </a:lnTo>
+                  <a:lnTo>
+                    <a:pt x="5228444" y="742196"/>
+                  </a:lnTo>
+                  <a:lnTo>
+                    <a:pt x="5156821" y="721840"/>
+                  </a:lnTo>
+                  <a:lnTo>
+                    <a:pt x="5085199" y="700880"/>
+                  </a:lnTo>
+                  <a:lnTo>
+                    <a:pt x="5013576" y="679299"/>
+                  </a:lnTo>
+                  <a:lnTo>
+                    <a:pt x="4941954" y="657078"/>
+                  </a:lnTo>
+                  <a:lnTo>
+                    <a:pt x="4870331" y="634199"/>
+                  </a:lnTo>
+                  <a:lnTo>
+                    <a:pt x="4798709" y="610642"/>
+                  </a:lnTo>
+                  <a:lnTo>
+                    <a:pt x="4727086" y="595885"/>
+                  </a:lnTo>
+                  <a:lnTo>
+                    <a:pt x="4655464" y="589047"/>
+                  </a:lnTo>
+                  <a:lnTo>
+                    <a:pt x="4583841" y="582152"/>
+                  </a:lnTo>
+                  <a:lnTo>
+                    <a:pt x="4512219" y="575200"/>
+                  </a:lnTo>
+                  <a:lnTo>
+                    <a:pt x="4440596" y="568192"/>
+                  </a:lnTo>
+                  <a:lnTo>
+                    <a:pt x="4368974" y="561126"/>
+                  </a:lnTo>
+                  <a:lnTo>
+                    <a:pt x="4297351" y="554002"/>
+                  </a:lnTo>
+                  <a:lnTo>
+                    <a:pt x="4225729" y="546819"/>
+                  </a:lnTo>
+                  <a:lnTo>
+                    <a:pt x="4154106" y="539577"/>
+                  </a:lnTo>
+                  <a:lnTo>
+                    <a:pt x="4082483" y="532276"/>
+                  </a:lnTo>
+                  <a:lnTo>
+                    <a:pt x="4010861" y="524916"/>
+                  </a:lnTo>
+                  <a:lnTo>
+                    <a:pt x="3939238" y="517494"/>
+                  </a:lnTo>
+                  <a:lnTo>
+                    <a:pt x="3867616" y="510012"/>
+                  </a:lnTo>
+                  <a:lnTo>
+                    <a:pt x="3795993" y="502468"/>
+                  </a:lnTo>
+                  <a:lnTo>
+                    <a:pt x="3724371" y="494863"/>
+                  </a:lnTo>
+                  <a:lnTo>
+                    <a:pt x="3652748" y="487195"/>
+                  </a:lnTo>
+                  <a:lnTo>
+                    <a:pt x="3581126" y="479464"/>
+                  </a:lnTo>
+                  <a:lnTo>
+                    <a:pt x="3509503" y="471669"/>
+                  </a:lnTo>
+                  <a:lnTo>
+                    <a:pt x="3437881" y="463811"/>
+                  </a:lnTo>
+                  <a:lnTo>
+                    <a:pt x="3366258" y="455888"/>
+                  </a:lnTo>
+                  <a:lnTo>
+                    <a:pt x="3294636" y="447900"/>
+                  </a:lnTo>
+                  <a:lnTo>
+                    <a:pt x="3223013" y="439847"/>
+                  </a:lnTo>
+                  <a:lnTo>
+                    <a:pt x="3151391" y="431727"/>
+                  </a:lnTo>
+                  <a:lnTo>
+                    <a:pt x="3079768" y="423541"/>
+                  </a:lnTo>
+                  <a:lnTo>
+                    <a:pt x="3008146" y="415287"/>
+                  </a:lnTo>
+                  <a:lnTo>
+                    <a:pt x="2936523" y="406966"/>
+                  </a:lnTo>
+                  <a:lnTo>
+                    <a:pt x="2864901" y="398576"/>
+                  </a:lnTo>
+                  <a:lnTo>
+                    <a:pt x="2793278" y="390118"/>
+                  </a:lnTo>
+                  <a:lnTo>
+                    <a:pt x="2721655" y="381590"/>
+                  </a:lnTo>
+                  <a:lnTo>
+                    <a:pt x="2650033" y="372992"/>
+                  </a:lnTo>
+                  <a:lnTo>
+                    <a:pt x="2578410" y="364324"/>
+                  </a:lnTo>
+                  <a:lnTo>
+                    <a:pt x="2506788" y="355584"/>
+                  </a:lnTo>
+                  <a:lnTo>
+                    <a:pt x="2435165" y="346773"/>
+                  </a:lnTo>
+                  <a:lnTo>
+                    <a:pt x="2363543" y="337890"/>
+                  </a:lnTo>
+                  <a:lnTo>
+                    <a:pt x="2291920" y="328933"/>
+                  </a:lnTo>
+                  <a:lnTo>
+                    <a:pt x="2220298" y="319903"/>
+                  </a:lnTo>
+                  <a:lnTo>
+                    <a:pt x="2148675" y="310799"/>
+                  </a:lnTo>
+                  <a:lnTo>
+                    <a:pt x="2077053" y="301620"/>
+                  </a:lnTo>
+                  <a:lnTo>
+                    <a:pt x="2005430" y="292366"/>
+                  </a:lnTo>
+                  <a:lnTo>
+                    <a:pt x="1933808" y="283035"/>
+                  </a:lnTo>
+                  <a:lnTo>
+                    <a:pt x="1862185" y="273629"/>
+                  </a:lnTo>
+                  <a:lnTo>
+                    <a:pt x="1790563" y="264144"/>
+                  </a:lnTo>
+                  <a:lnTo>
+                    <a:pt x="1718940" y="254583"/>
+                  </a:lnTo>
+                  <a:lnTo>
+                    <a:pt x="1647318" y="244942"/>
+                  </a:lnTo>
+                  <a:lnTo>
+                    <a:pt x="1575695" y="235223"/>
+                  </a:lnTo>
+                  <a:lnTo>
+                    <a:pt x="1504073" y="225423"/>
+                  </a:lnTo>
+                  <a:lnTo>
+                    <a:pt x="1432450" y="215544"/>
+                  </a:lnTo>
+                  <a:lnTo>
+                    <a:pt x="1360827" y="205583"/>
+                  </a:lnTo>
+                  <a:lnTo>
+                    <a:pt x="1289205" y="195540"/>
+                  </a:lnTo>
+                  <a:lnTo>
+                    <a:pt x="1217582" y="185415"/>
+                  </a:lnTo>
+                  <a:lnTo>
+                    <a:pt x="1145960" y="175207"/>
+                  </a:lnTo>
+                  <a:lnTo>
+                    <a:pt x="1074337" y="164915"/>
+                  </a:lnTo>
+                  <a:lnTo>
+                    <a:pt x="1002715" y="154539"/>
+                  </a:lnTo>
+                  <a:lnTo>
+                    <a:pt x="931092" y="144077"/>
+                  </a:lnTo>
+                  <a:lnTo>
+                    <a:pt x="859470" y="133530"/>
+                  </a:lnTo>
+                  <a:lnTo>
+                    <a:pt x="787847" y="122896"/>
+                  </a:lnTo>
+                  <a:lnTo>
+                    <a:pt x="716225" y="112174"/>
+                  </a:lnTo>
+                  <a:lnTo>
+                    <a:pt x="644602" y="101365"/>
+                  </a:lnTo>
+                  <a:lnTo>
+                    <a:pt x="572980" y="90467"/>
+                  </a:lnTo>
+                  <a:lnTo>
+                    <a:pt x="501357" y="79479"/>
+                  </a:lnTo>
+                  <a:lnTo>
+                    <a:pt x="429735" y="68402"/>
+                  </a:lnTo>
+                  <a:lnTo>
+                    <a:pt x="358112" y="57233"/>
+                  </a:lnTo>
+                  <a:lnTo>
+                    <a:pt x="286490" y="45973"/>
+                  </a:lnTo>
+                  <a:lnTo>
+                    <a:pt x="214867" y="34620"/>
+                  </a:lnTo>
+                  <a:lnTo>
+                    <a:pt x="143245" y="23174"/>
+                  </a:lnTo>
+                  <a:lnTo>
+                    <a:pt x="71622" y="11634"/>
                   </a:lnTo>
                   <a:lnTo>
                     <a:pt x="0" y="0"/>
@@ -4224,312 +4224,312 @@
           </p:nvSpPr>
           <p:spPr>
             <a:xfrm>
-              <a:off x="1172049" y="2705052"/>
-              <a:ext cx="7090630" cy="2398126"/>
+              <a:off x="1172049" y="2680264"/>
+              <a:ext cx="7090630" cy="2424827"/>
             </a:xfrm>
             <a:custGeom>
               <a:avLst/>
               <a:pathLst>
-                <a:path w="7090630" h="2398126">
+                <a:path w="7090630" h="2424827">
                   <a:moveTo>
                     <a:pt x="0" y="0"/>
                   </a:moveTo>
                   <a:lnTo>
-                    <a:pt x="71622" y="52452"/>
-                  </a:lnTo>
-                  <a:lnTo>
-                    <a:pt x="143245" y="103941"/>
-                  </a:lnTo>
-                  <a:lnTo>
-                    <a:pt x="214867" y="154482"/>
-                  </a:lnTo>
-                  <a:lnTo>
-                    <a:pt x="286490" y="204094"/>
-                  </a:lnTo>
-                  <a:lnTo>
-                    <a:pt x="358112" y="252793"/>
-                  </a:lnTo>
-                  <a:lnTo>
-                    <a:pt x="429735" y="300597"/>
-                  </a:lnTo>
-                  <a:lnTo>
-                    <a:pt x="501357" y="347522"/>
-                  </a:lnTo>
-                  <a:lnTo>
-                    <a:pt x="572980" y="393584"/>
-                  </a:lnTo>
-                  <a:lnTo>
-                    <a:pt x="644602" y="438798"/>
-                  </a:lnTo>
-                  <a:lnTo>
-                    <a:pt x="716225" y="483181"/>
-                  </a:lnTo>
-                  <a:lnTo>
-                    <a:pt x="787847" y="526748"/>
-                  </a:lnTo>
-                  <a:lnTo>
-                    <a:pt x="859470" y="569514"/>
-                  </a:lnTo>
-                  <a:lnTo>
-                    <a:pt x="931092" y="611493"/>
-                  </a:lnTo>
-                  <a:lnTo>
-                    <a:pt x="1002715" y="652701"/>
-                  </a:lnTo>
-                  <a:lnTo>
-                    <a:pt x="1074337" y="693150"/>
-                  </a:lnTo>
-                  <a:lnTo>
-                    <a:pt x="1145960" y="732856"/>
-                  </a:lnTo>
-                  <a:lnTo>
-                    <a:pt x="1217582" y="771831"/>
-                  </a:lnTo>
-                  <a:lnTo>
-                    <a:pt x="1289205" y="810090"/>
-                  </a:lnTo>
-                  <a:lnTo>
-                    <a:pt x="1360827" y="847645"/>
-                  </a:lnTo>
-                  <a:lnTo>
-                    <a:pt x="1432450" y="884509"/>
-                  </a:lnTo>
-                  <a:lnTo>
-                    <a:pt x="1504073" y="920695"/>
-                  </a:lnTo>
-                  <a:lnTo>
-                    <a:pt x="1575695" y="956216"/>
-                  </a:lnTo>
-                  <a:lnTo>
-                    <a:pt x="1647318" y="991084"/>
-                  </a:lnTo>
-                  <a:lnTo>
-                    <a:pt x="1718940" y="1025311"/>
-                  </a:lnTo>
-                  <a:lnTo>
-                    <a:pt x="1790563" y="1058908"/>
-                  </a:lnTo>
-                  <a:lnTo>
-                    <a:pt x="1862185" y="1091887"/>
-                  </a:lnTo>
-                  <a:lnTo>
-                    <a:pt x="1933808" y="1124259"/>
-                  </a:lnTo>
-                  <a:lnTo>
-                    <a:pt x="2005430" y="1156037"/>
-                  </a:lnTo>
-                  <a:lnTo>
-                    <a:pt x="2077053" y="1187230"/>
-                  </a:lnTo>
-                  <a:lnTo>
-                    <a:pt x="2148675" y="1217849"/>
-                  </a:lnTo>
-                  <a:lnTo>
-                    <a:pt x="2220298" y="1247905"/>
-                  </a:lnTo>
-                  <a:lnTo>
-                    <a:pt x="2291920" y="1277409"/>
-                  </a:lnTo>
-                  <a:lnTo>
-                    <a:pt x="2363543" y="1306369"/>
-                  </a:lnTo>
-                  <a:lnTo>
-                    <a:pt x="2435165" y="1334798"/>
-                  </a:lnTo>
-                  <a:lnTo>
-                    <a:pt x="2506788" y="1362703"/>
-                  </a:lnTo>
-                  <a:lnTo>
-                    <a:pt x="2578410" y="1390095"/>
-                  </a:lnTo>
-                  <a:lnTo>
-                    <a:pt x="2650033" y="1416984"/>
-                  </a:lnTo>
-                  <a:lnTo>
-                    <a:pt x="2721655" y="1443378"/>
-                  </a:lnTo>
-                  <a:lnTo>
-                    <a:pt x="2793278" y="1469287"/>
-                  </a:lnTo>
-                  <a:lnTo>
-                    <a:pt x="2864901" y="1494719"/>
-                  </a:lnTo>
-                  <a:lnTo>
-                    <a:pt x="2936523" y="1519683"/>
-                  </a:lnTo>
-                  <a:lnTo>
-                    <a:pt x="3008146" y="1544189"/>
-                  </a:lnTo>
-                  <a:lnTo>
-                    <a:pt x="3079768" y="1568243"/>
-                  </a:lnTo>
-                  <a:lnTo>
-                    <a:pt x="3151391" y="1591856"/>
-                  </a:lnTo>
-                  <a:lnTo>
-                    <a:pt x="3223013" y="1615034"/>
-                  </a:lnTo>
-                  <a:lnTo>
-                    <a:pt x="3294636" y="1637786"/>
-                  </a:lnTo>
-                  <a:lnTo>
-                    <a:pt x="3366258" y="1660119"/>
-                  </a:lnTo>
-                  <a:lnTo>
-                    <a:pt x="3437881" y="1682042"/>
-                  </a:lnTo>
-                  <a:lnTo>
-                    <a:pt x="3509503" y="1703561"/>
-                  </a:lnTo>
-                  <a:lnTo>
-                    <a:pt x="3581126" y="1724685"/>
-                  </a:lnTo>
-                  <a:lnTo>
-                    <a:pt x="3652748" y="1745420"/>
-                  </a:lnTo>
-                  <a:lnTo>
-                    <a:pt x="3724371" y="1765774"/>
-                  </a:lnTo>
-                  <a:lnTo>
-                    <a:pt x="3795993" y="1785754"/>
-                  </a:lnTo>
-                  <a:lnTo>
-                    <a:pt x="3867616" y="1805366"/>
-                  </a:lnTo>
-                  <a:lnTo>
-                    <a:pt x="3939238" y="1824618"/>
-                  </a:lnTo>
-                  <a:lnTo>
-                    <a:pt x="4010861" y="1843515"/>
-                  </a:lnTo>
-                  <a:lnTo>
-                    <a:pt x="4082483" y="1862065"/>
-                  </a:lnTo>
-                  <a:lnTo>
-                    <a:pt x="4154106" y="1880274"/>
-                  </a:lnTo>
-                  <a:lnTo>
-                    <a:pt x="4225729" y="1898148"/>
-                  </a:lnTo>
-                  <a:lnTo>
-                    <a:pt x="4297351" y="1915693"/>
-                  </a:lnTo>
-                  <a:lnTo>
-                    <a:pt x="4368974" y="1932916"/>
-                  </a:lnTo>
-                  <a:lnTo>
-                    <a:pt x="4440596" y="1949822"/>
-                  </a:lnTo>
-                  <a:lnTo>
-                    <a:pt x="4512219" y="1966417"/>
-                  </a:lnTo>
-                  <a:lnTo>
-                    <a:pt x="4583841" y="1982707"/>
-                  </a:lnTo>
-                  <a:lnTo>
-                    <a:pt x="4655464" y="1998697"/>
-                  </a:lnTo>
-                  <a:lnTo>
-                    <a:pt x="4727086" y="2014393"/>
-                  </a:lnTo>
-                  <a:lnTo>
-                    <a:pt x="4798709" y="2029800"/>
-                  </a:lnTo>
-                  <a:lnTo>
-                    <a:pt x="4870331" y="2044925"/>
-                  </a:lnTo>
-                  <a:lnTo>
-                    <a:pt x="4941954" y="2059771"/>
-                  </a:lnTo>
-                  <a:lnTo>
-                    <a:pt x="5013576" y="2074344"/>
-                  </a:lnTo>
-                  <a:lnTo>
-                    <a:pt x="5085199" y="2088648"/>
-                  </a:lnTo>
-                  <a:lnTo>
-                    <a:pt x="5156821" y="2102690"/>
-                  </a:lnTo>
-                  <a:lnTo>
-                    <a:pt x="5228444" y="2116474"/>
-                  </a:lnTo>
-                  <a:lnTo>
-                    <a:pt x="5300066" y="2130004"/>
-                  </a:lnTo>
-                  <a:lnTo>
-                    <a:pt x="5371689" y="2143286"/>
-                  </a:lnTo>
-                  <a:lnTo>
-                    <a:pt x="5443311" y="2156323"/>
-                  </a:lnTo>
-                  <a:lnTo>
-                    <a:pt x="5514934" y="2169120"/>
-                  </a:lnTo>
-                  <a:lnTo>
-                    <a:pt x="5586557" y="2181682"/>
-                  </a:lnTo>
-                  <a:lnTo>
-                    <a:pt x="5658179" y="2194013"/>
-                  </a:lnTo>
-                  <a:lnTo>
-                    <a:pt x="5729802" y="2206117"/>
-                  </a:lnTo>
-                  <a:lnTo>
-                    <a:pt x="5801424" y="2217999"/>
-                  </a:lnTo>
-                  <a:lnTo>
-                    <a:pt x="5873047" y="2229662"/>
-                  </a:lnTo>
-                  <a:lnTo>
-                    <a:pt x="5944669" y="2241111"/>
-                  </a:lnTo>
-                  <a:lnTo>
-                    <a:pt x="6016292" y="2252349"/>
-                  </a:lnTo>
-                  <a:lnTo>
-                    <a:pt x="6087914" y="2263380"/>
-                  </a:lnTo>
-                  <a:lnTo>
-                    <a:pt x="6159537" y="2274209"/>
-                  </a:lnTo>
-                  <a:lnTo>
-                    <a:pt x="6231159" y="2284838"/>
-                  </a:lnTo>
-                  <a:lnTo>
-                    <a:pt x="6302782" y="2295272"/>
-                  </a:lnTo>
-                  <a:lnTo>
-                    <a:pt x="6374404" y="2305514"/>
-                  </a:lnTo>
-                  <a:lnTo>
-                    <a:pt x="6446027" y="2315568"/>
-                  </a:lnTo>
-                  <a:lnTo>
-                    <a:pt x="6517649" y="2325436"/>
-                  </a:lnTo>
-                  <a:lnTo>
-                    <a:pt x="6589272" y="2335124"/>
-                  </a:lnTo>
-                  <a:lnTo>
-                    <a:pt x="6660894" y="2344633"/>
-                  </a:lnTo>
-                  <a:lnTo>
-                    <a:pt x="6732517" y="2353967"/>
-                  </a:lnTo>
-                  <a:lnTo>
-                    <a:pt x="6804139" y="2363130"/>
-                  </a:lnTo>
-                  <a:lnTo>
-                    <a:pt x="6875762" y="2372124"/>
-                  </a:lnTo>
-                  <a:lnTo>
-                    <a:pt x="6947385" y="2380953"/>
-                  </a:lnTo>
-                  <a:lnTo>
-                    <a:pt x="7019007" y="2389619"/>
-                  </a:lnTo>
-                  <a:lnTo>
-                    <a:pt x="7090630" y="2398126"/>
+                    <a:pt x="71622" y="53275"/>
+                  </a:lnTo>
+                  <a:lnTo>
+                    <a:pt x="143245" y="105565"/>
+                  </a:lnTo>
+                  <a:lnTo>
+                    <a:pt x="214867" y="156886"/>
+                  </a:lnTo>
+                  <a:lnTo>
+                    <a:pt x="286490" y="207257"/>
+                  </a:lnTo>
+                  <a:lnTo>
+                    <a:pt x="358112" y="256695"/>
+                  </a:lnTo>
+                  <a:lnTo>
+                    <a:pt x="429735" y="305217"/>
+                  </a:lnTo>
+                  <a:lnTo>
+                    <a:pt x="501357" y="352841"/>
+                  </a:lnTo>
+                  <a:lnTo>
+                    <a:pt x="572980" y="399583"/>
+                  </a:lnTo>
+                  <a:lnTo>
+                    <a:pt x="644602" y="445459"/>
+                  </a:lnTo>
+                  <a:lnTo>
+                    <a:pt x="716225" y="490486"/>
+                  </a:lnTo>
+                  <a:lnTo>
+                    <a:pt x="787847" y="534679"/>
+                  </a:lnTo>
+                  <a:lnTo>
+                    <a:pt x="859470" y="578054"/>
+                  </a:lnTo>
+                  <a:lnTo>
+                    <a:pt x="931092" y="620626"/>
+                  </a:lnTo>
+                  <a:lnTo>
+                    <a:pt x="1002715" y="662409"/>
+                  </a:lnTo>
+                  <a:lnTo>
+                    <a:pt x="1074337" y="703418"/>
+                  </a:lnTo>
+                  <a:lnTo>
+                    <a:pt x="1145960" y="743668"/>
+                  </a:lnTo>
+                  <a:lnTo>
+                    <a:pt x="1217582" y="783173"/>
+                  </a:lnTo>
+                  <a:lnTo>
+                    <a:pt x="1289205" y="821946"/>
+                  </a:lnTo>
+                  <a:lnTo>
+                    <a:pt x="1360827" y="860001"/>
+                  </a:lnTo>
+                  <a:lnTo>
+                    <a:pt x="1432450" y="897352"/>
+                  </a:lnTo>
+                  <a:lnTo>
+                    <a:pt x="1504073" y="934011"/>
+                  </a:lnTo>
+                  <a:lnTo>
+                    <a:pt x="1575695" y="969991"/>
+                  </a:lnTo>
+                  <a:lnTo>
+                    <a:pt x="1647318" y="1005304"/>
+                  </a:lnTo>
+                  <a:lnTo>
+                    <a:pt x="1718940" y="1039964"/>
+                  </a:lnTo>
+                  <a:lnTo>
+                    <a:pt x="1790563" y="1073982"/>
+                  </a:lnTo>
+                  <a:lnTo>
+                    <a:pt x="1862185" y="1107370"/>
+                  </a:lnTo>
+                  <a:lnTo>
+                    <a:pt x="1933808" y="1140140"/>
+                  </a:lnTo>
+                  <a:lnTo>
+                    <a:pt x="2005430" y="1172302"/>
+                  </a:lnTo>
+                  <a:lnTo>
+                    <a:pt x="2077053" y="1203870"/>
+                  </a:lnTo>
+                  <a:lnTo>
+                    <a:pt x="2148675" y="1234852"/>
+                  </a:lnTo>
+                  <a:lnTo>
+                    <a:pt x="2220298" y="1265261"/>
+                  </a:lnTo>
+                  <a:lnTo>
+                    <a:pt x="2291920" y="1295107"/>
+                  </a:lnTo>
+                  <a:lnTo>
+                    <a:pt x="2363543" y="1324400"/>
+                  </a:lnTo>
+                  <a:lnTo>
+                    <a:pt x="2435165" y="1353151"/>
+                  </a:lnTo>
+                  <a:lnTo>
+                    <a:pt x="2506788" y="1381369"/>
+                  </a:lnTo>
+                  <a:lnTo>
+                    <a:pt x="2578410" y="1409065"/>
+                  </a:lnTo>
+                  <a:lnTo>
+                    <a:pt x="2650033" y="1436248"/>
+                  </a:lnTo>
+                  <a:lnTo>
+                    <a:pt x="2721655" y="1462928"/>
+                  </a:lnTo>
+                  <a:lnTo>
+                    <a:pt x="2793278" y="1489113"/>
+                  </a:lnTo>
+                  <a:lnTo>
+                    <a:pt x="2864901" y="1514814"/>
+                  </a:lnTo>
+                  <a:lnTo>
+                    <a:pt x="2936523" y="1540038"/>
+                  </a:lnTo>
+                  <a:lnTo>
+                    <a:pt x="3008146" y="1564796"/>
+                  </a:lnTo>
+                  <a:lnTo>
+                    <a:pt x="3079768" y="1589095"/>
+                  </a:lnTo>
+                  <a:lnTo>
+                    <a:pt x="3151391" y="1612944"/>
+                  </a:lnTo>
+                  <a:lnTo>
+                    <a:pt x="3223013" y="1636352"/>
+                  </a:lnTo>
+                  <a:lnTo>
+                    <a:pt x="3294636" y="1659326"/>
+                  </a:lnTo>
+                  <a:lnTo>
+                    <a:pt x="3366258" y="1681874"/>
+                  </a:lnTo>
+                  <a:lnTo>
+                    <a:pt x="3437881" y="1704005"/>
+                  </a:lnTo>
+                  <a:lnTo>
+                    <a:pt x="3509503" y="1725726"/>
+                  </a:lnTo>
+                  <a:lnTo>
+                    <a:pt x="3581126" y="1747045"/>
+                  </a:lnTo>
+                  <a:lnTo>
+                    <a:pt x="3652748" y="1767970"/>
+                  </a:lnTo>
+                  <a:lnTo>
+                    <a:pt x="3724371" y="1788506"/>
+                  </a:lnTo>
+                  <a:lnTo>
+                    <a:pt x="3795993" y="1808663"/>
+                  </a:lnTo>
+                  <a:lnTo>
+                    <a:pt x="3867616" y="1828446"/>
+                  </a:lnTo>
+                  <a:lnTo>
+                    <a:pt x="3939238" y="1847863"/>
+                  </a:lnTo>
+                  <a:lnTo>
+                    <a:pt x="4010861" y="1866920"/>
+                  </a:lnTo>
+                  <a:lnTo>
+                    <a:pt x="4082483" y="1885624"/>
+                  </a:lnTo>
+                  <a:lnTo>
+                    <a:pt x="4154106" y="1903982"/>
+                  </a:lnTo>
+                  <a:lnTo>
+                    <a:pt x="4225729" y="1922000"/>
+                  </a:lnTo>
+                  <a:lnTo>
+                    <a:pt x="4297351" y="1939685"/>
+                  </a:lnTo>
+                  <a:lnTo>
+                    <a:pt x="4368974" y="1957042"/>
+                  </a:lnTo>
+                  <a:lnTo>
+                    <a:pt x="4440596" y="1974077"/>
+                  </a:lnTo>
+                  <a:lnTo>
+                    <a:pt x="4512219" y="1990797"/>
+                  </a:lnTo>
+                  <a:lnTo>
+                    <a:pt x="4583841" y="2007208"/>
+                  </a:lnTo>
+                  <a:lnTo>
+                    <a:pt x="4655464" y="2023314"/>
+                  </a:lnTo>
+                  <a:lnTo>
+                    <a:pt x="4727086" y="2039122"/>
+                  </a:lnTo>
+                  <a:lnTo>
+                    <a:pt x="4798709" y="2054638"/>
+                  </a:lnTo>
+                  <a:lnTo>
+                    <a:pt x="4870331" y="2069866"/>
+                  </a:lnTo>
+                  <a:lnTo>
+                    <a:pt x="4941954" y="2084812"/>
+                  </a:lnTo>
+                  <a:lnTo>
+                    <a:pt x="5013576" y="2099482"/>
+                  </a:lnTo>
+                  <a:lnTo>
+                    <a:pt x="5085199" y="2113880"/>
+                  </a:lnTo>
+                  <a:lnTo>
+                    <a:pt x="5156821" y="2128011"/>
+                  </a:lnTo>
+                  <a:lnTo>
+                    <a:pt x="5228444" y="2141880"/>
+                  </a:lnTo>
+                  <a:lnTo>
+                    <a:pt x="5300066" y="2155493"/>
+                  </a:lnTo>
+                  <a:lnTo>
+                    <a:pt x="5371689" y="2168853"/>
+                  </a:lnTo>
+                  <a:lnTo>
+                    <a:pt x="5443311" y="2181967"/>
+                  </a:lnTo>
+                  <a:lnTo>
+                    <a:pt x="5514934" y="2194837"/>
+                  </a:lnTo>
+                  <a:lnTo>
+                    <a:pt x="5586557" y="2207469"/>
+                  </a:lnTo>
+                  <a:lnTo>
+                    <a:pt x="5658179" y="2219867"/>
+                  </a:lnTo>
+                  <a:lnTo>
+                    <a:pt x="5729802" y="2232035"/>
+                  </a:lnTo>
+                  <a:lnTo>
+                    <a:pt x="5801424" y="2243979"/>
+                  </a:lnTo>
+                  <a:lnTo>
+                    <a:pt x="5873047" y="2255701"/>
+                  </a:lnTo>
+                  <a:lnTo>
+                    <a:pt x="5944669" y="2267206"/>
+                  </a:lnTo>
+                  <a:lnTo>
+                    <a:pt x="6016292" y="2278497"/>
+                  </a:lnTo>
+                  <a:lnTo>
+                    <a:pt x="6087914" y="2289580"/>
+                  </a:lnTo>
+                  <a:lnTo>
+                    <a:pt x="6159537" y="2300458"/>
+                  </a:lnTo>
+                  <a:lnTo>
+                    <a:pt x="6231159" y="2311134"/>
+                  </a:lnTo>
+                  <a:lnTo>
+                    <a:pt x="6302782" y="2321612"/>
+                  </a:lnTo>
+                  <a:lnTo>
+                    <a:pt x="6374404" y="2331897"/>
+                  </a:lnTo>
+                  <a:lnTo>
+                    <a:pt x="6446027" y="2341991"/>
+                  </a:lnTo>
+                  <a:lnTo>
+                    <a:pt x="6517649" y="2351898"/>
+                  </a:lnTo>
+                  <a:lnTo>
+                    <a:pt x="6589272" y="2361621"/>
+                  </a:lnTo>
+                  <a:lnTo>
+                    <a:pt x="6660894" y="2371165"/>
+                  </a:lnTo>
+                  <a:lnTo>
+                    <a:pt x="6732517" y="2380531"/>
+                  </a:lnTo>
+                  <a:lnTo>
+                    <a:pt x="6804139" y="2389725"/>
+                  </a:lnTo>
+                  <a:lnTo>
+                    <a:pt x="6875762" y="2398748"/>
+                  </a:lnTo>
+                  <a:lnTo>
+                    <a:pt x="6947385" y="2407604"/>
+                  </a:lnTo>
+                  <a:lnTo>
+                    <a:pt x="7019007" y="2416296"/>
+                  </a:lnTo>
+                  <a:lnTo>
+                    <a:pt x="7090630" y="2424827"/>
                   </a:lnTo>
                 </a:path>
               </a:pathLst>
@@ -5269,7 +5269,7 @@
                   <a:latin typeface="Helvetica"/>
                   <a:cs typeface="Helvetica"/>
                 </a:rPr>
-                <a:t>subHR per 10 mL/min decline: 1.25 (1.10-1.42), p_Bonf = 0.003 (n = 6)  |  per IQR decline (Δ = 23.3): 1.69 (1.25-2.28)  |  IQR: [-12.8, 10.5]</a:t>
+                <a:t>subHR per 10 mL/min decline: 1.26 (1.10-1.43), p_Bonf = 0.003 (n = 6)  |  per IQR decline (Δ = 23.3): 1.70 (1.26-2.28)  |  IQR: [-12.8, 10.5]</a:t>
               </a:r>
             </a:p>
           </p:txBody>
